--- a/wzry.favicon.pptx
+++ b/wzry.favicon.pptx
@@ -8,6 +8,9 @@
     <p:sldId id="256" r:id="rId2"/>
     <p:sldId id="257" r:id="rId3"/>
     <p:sldId id="258" r:id="rId4"/>
+    <p:sldId id="259" r:id="rId5"/>
+    <p:sldId id="260" r:id="rId6"/>
+    <p:sldId id="261" r:id="rId7"/>
   </p:sldIdLst>
   <p:sldSz cx="12192000" cy="6858000"/>
   <p:notesSz cx="6858000" cy="9144000"/>
@@ -8047,7 +8050,7 @@
         </p:blipFill>
         <p:spPr>
           <a:xfrm>
-            <a:off x="2959712" y="7674920"/>
+            <a:off x="-2996166" y="10667836"/>
             <a:ext cx="22795831" cy="8839200"/>
           </a:xfrm>
           <a:prstGeom prst="rect">
@@ -8072,7 +8075,7 @@
         </p:nvSpPr>
         <p:spPr>
           <a:xfrm>
-            <a:off x="15937818" y="8754615"/>
+            <a:off x="2992227" y="724238"/>
             <a:ext cx="5409523" cy="5409523"/>
           </a:xfrm>
           <a:prstGeom prst="roundRect">
@@ -8085,7 +8088,7 @@
           </a:solidFill>
           <a:ln w="508000">
             <a:solidFill>
-              <a:srgbClr val="FCBC50"/>
+              <a:srgbClr val="ED9914"/>
             </a:solidFill>
           </a:ln>
           <a:effectLst>
@@ -8146,7 +8149,7 @@
         </p:nvGrpSpPr>
         <p:grpSpPr>
           <a:xfrm>
-            <a:off x="16043575" y="9500235"/>
+            <a:off x="3097984" y="1469858"/>
             <a:ext cx="5198008" cy="3918283"/>
             <a:chOff x="16057796" y="9461491"/>
             <a:chExt cx="5198008" cy="3918283"/>
@@ -8278,7 +8281,7 @@
               </a:pathLst>
             </a:custGeom>
             <a:solidFill>
-              <a:srgbClr val="42B4A5"/>
+              <a:srgbClr val="F9D55B"/>
             </a:solidFill>
             <a:ln w="254000">
               <a:solidFill>
@@ -8457,7 +8460,7 @@
               </a:pathLst>
             </a:custGeom>
             <a:solidFill>
-              <a:srgbClr val="EAD49A"/>
+              <a:srgbClr val="92C4C1"/>
             </a:solidFill>
             <a:ln w="254000">
               <a:solidFill>
@@ -8528,7 +8531,7 @@
         </p:nvSpPr>
         <p:spPr>
           <a:xfrm>
-            <a:off x="19804630" y="9375754"/>
+            <a:off x="6859039" y="1345377"/>
             <a:ext cx="900000" cy="900000"/>
           </a:xfrm>
           <a:prstGeom prst="ellipse">
@@ -8602,14 +8605,14 @@
         </p:nvSpPr>
         <p:spPr>
           <a:xfrm>
-            <a:off x="16580528" y="12642998"/>
+            <a:off x="3634937" y="4612621"/>
             <a:ext cx="900000" cy="900000"/>
           </a:xfrm>
           <a:prstGeom prst="ellipse">
             <a:avLst/>
           </a:prstGeom>
           <a:solidFill>
-            <a:srgbClr val="7030A0"/>
+            <a:srgbClr val="684EB3"/>
           </a:solidFill>
           <a:ln w="38100">
             <a:solidFill>
@@ -8660,12 +8663,1447 @@
           </a:p>
         </p:txBody>
       </p:sp>
+      <p:pic>
+        <p:nvPicPr>
+          <p:cNvPr id="3" name="图片 2">
+            <a:extLst>
+              <a:ext uri="{FF2B5EF4-FFF2-40B4-BE49-F238E27FC236}">
+                <a16:creationId xmlns:a16="http://schemas.microsoft.com/office/drawing/2014/main" id="{EAB2175C-C157-4666-9ADE-6BC5DB70256C}"/>
+              </a:ext>
+            </a:extLst>
+          </p:cNvPr>
+          <p:cNvPicPr>
+            <a:picLocks noChangeAspect="1"/>
+          </p:cNvPicPr>
+          <p:nvPr/>
+        </p:nvPicPr>
+        <p:blipFill>
+          <a:blip r:embed="rId3"/>
+          <a:stretch>
+            <a:fillRect/>
+          </a:stretch>
+        </p:blipFill>
+        <p:spPr>
+          <a:xfrm>
+            <a:off x="6598409" y="-5544235"/>
+            <a:ext cx="6888472" cy="5349930"/>
+          </a:xfrm>
+          <a:prstGeom prst="rect">
+            <a:avLst/>
+          </a:prstGeom>
+        </p:spPr>
+      </p:pic>
+      <p:pic>
+        <p:nvPicPr>
+          <p:cNvPr id="5" name="图片 4">
+            <a:extLst>
+              <a:ext uri="{FF2B5EF4-FFF2-40B4-BE49-F238E27FC236}">
+                <a16:creationId xmlns:a16="http://schemas.microsoft.com/office/drawing/2014/main" id="{7C47ED3A-8DBF-4B90-8231-D7529BAA01BB}"/>
+              </a:ext>
+            </a:extLst>
+          </p:cNvPr>
+          <p:cNvPicPr>
+            <a:picLocks noChangeAspect="1"/>
+          </p:cNvPicPr>
+          <p:nvPr/>
+        </p:nvPicPr>
+        <p:blipFill>
+          <a:blip r:embed="rId4"/>
+          <a:stretch>
+            <a:fillRect/>
+          </a:stretch>
+        </p:blipFill>
+        <p:spPr>
+          <a:xfrm>
+            <a:off x="-290063" y="-5524916"/>
+            <a:ext cx="6888472" cy="5378072"/>
+          </a:xfrm>
+          <a:prstGeom prst="rect">
+            <a:avLst/>
+          </a:prstGeom>
+        </p:spPr>
+      </p:pic>
+      <p:pic>
+        <p:nvPicPr>
+          <p:cNvPr id="13" name="图片 12">
+            <a:extLst>
+              <a:ext uri="{FF2B5EF4-FFF2-40B4-BE49-F238E27FC236}">
+                <a16:creationId xmlns:a16="http://schemas.microsoft.com/office/drawing/2014/main" id="{079BA92A-9B29-4BD6-AF4F-67B26859FA9B}"/>
+              </a:ext>
+            </a:extLst>
+          </p:cNvPr>
+          <p:cNvPicPr>
+            <a:picLocks noChangeAspect="1"/>
+          </p:cNvPicPr>
+          <p:nvPr/>
+        </p:nvPicPr>
+        <p:blipFill>
+          <a:blip r:embed="rId5"/>
+          <a:stretch>
+            <a:fillRect/>
+          </a:stretch>
+        </p:blipFill>
+        <p:spPr>
+          <a:xfrm>
+            <a:off x="-7381945" y="-194304"/>
+            <a:ext cx="6859772" cy="5304308"/>
+          </a:xfrm>
+          <a:prstGeom prst="rect">
+            <a:avLst/>
+          </a:prstGeom>
+        </p:spPr>
+      </p:pic>
+      <p:pic>
+        <p:nvPicPr>
+          <p:cNvPr id="15" name="图片 14">
+            <a:extLst>
+              <a:ext uri="{FF2B5EF4-FFF2-40B4-BE49-F238E27FC236}">
+                <a16:creationId xmlns:a16="http://schemas.microsoft.com/office/drawing/2014/main" id="{8CEF48B7-C751-40CA-BE58-83091E78DCF7}"/>
+              </a:ext>
+            </a:extLst>
+          </p:cNvPr>
+          <p:cNvPicPr>
+            <a:picLocks noChangeAspect="1"/>
+          </p:cNvPicPr>
+          <p:nvPr/>
+        </p:nvPicPr>
+        <p:blipFill>
+          <a:blip r:embed="rId6"/>
+          <a:stretch>
+            <a:fillRect/>
+          </a:stretch>
+        </p:blipFill>
+        <p:spPr>
+          <a:xfrm>
+            <a:off x="-7178536" y="-5545823"/>
+            <a:ext cx="6530676" cy="5088623"/>
+          </a:xfrm>
+          <a:prstGeom prst="rect">
+            <a:avLst/>
+          </a:prstGeom>
+        </p:spPr>
+      </p:pic>
+    </p:spTree>
+    <p:extLst>
+      <p:ext uri="{BB962C8B-B14F-4D97-AF65-F5344CB8AC3E}">
+        <p14:creationId xmlns:p14="http://schemas.microsoft.com/office/powerpoint/2010/main" val="2438560776"/>
+      </p:ext>
+    </p:extLst>
+  </p:cSld>
+  <p:clrMapOvr>
+    <a:masterClrMapping/>
+  </p:clrMapOvr>
+</p:sld>
+</file>
+
+<file path=ppt/slides/slide4.xml><?xml version="1.0" encoding="utf-8"?>
+<p:sld xmlns:a="http://schemas.openxmlformats.org/drawingml/2006/main" xmlns:r="http://schemas.openxmlformats.org/officeDocument/2006/relationships" xmlns:p="http://schemas.openxmlformats.org/presentationml/2006/main">
+  <p:cSld>
+    <p:spTree>
+      <p:nvGrpSpPr>
+        <p:cNvPr id="1" name=""/>
+        <p:cNvGrpSpPr/>
+        <p:nvPr/>
+      </p:nvGrpSpPr>
+      <p:grpSpPr>
+        <a:xfrm>
+          <a:off x="0" y="0"/>
+          <a:ext cx="0" cy="0"/>
+          <a:chOff x="0" y="0"/>
+          <a:chExt cx="0" cy="0"/>
+        </a:xfrm>
+      </p:grpSpPr>
+      <p:grpSp>
+        <p:nvGrpSpPr>
+          <p:cNvPr id="4" name="组合 3">
+            <a:extLst>
+              <a:ext uri="{FF2B5EF4-FFF2-40B4-BE49-F238E27FC236}">
+                <a16:creationId xmlns:a16="http://schemas.microsoft.com/office/drawing/2014/main" id="{775FBACE-8EDA-411E-89B7-155101D5FE8F}"/>
+              </a:ext>
+            </a:extLst>
+          </p:cNvPr>
+          <p:cNvGrpSpPr/>
+          <p:nvPr/>
+        </p:nvGrpSpPr>
+        <p:grpSpPr>
+          <a:xfrm>
+            <a:off x="3341208" y="724238"/>
+            <a:ext cx="5968168" cy="5409523"/>
+            <a:chOff x="4560408" y="8700145"/>
+            <a:chExt cx="5968168" cy="5409523"/>
+          </a:xfrm>
+        </p:grpSpPr>
+        <p:sp>
+          <p:nvSpPr>
+            <p:cNvPr id="5" name="矩形: 圆角 4">
+              <a:extLst>
+                <a:ext uri="{FF2B5EF4-FFF2-40B4-BE49-F238E27FC236}">
+                  <a16:creationId xmlns:a16="http://schemas.microsoft.com/office/drawing/2014/main" id="{B0253443-2874-4EA4-A4CC-13495C95055A}"/>
+                </a:ext>
+              </a:extLst>
+            </p:cNvPr>
+            <p:cNvSpPr/>
+            <p:nvPr/>
+          </p:nvSpPr>
+          <p:spPr>
+            <a:xfrm>
+              <a:off x="4839731" y="8700145"/>
+              <a:ext cx="5409523" cy="5409523"/>
+            </a:xfrm>
+            <a:prstGeom prst="roundRect">
+              <a:avLst>
+                <a:gd name="adj" fmla="val 9800"/>
+              </a:avLst>
+            </a:prstGeom>
+            <a:solidFill>
+              <a:srgbClr val="65ACF3"/>
+            </a:solidFill>
+            <a:ln w="508000">
+              <a:solidFill>
+                <a:srgbClr val="FAD960"/>
+              </a:solidFill>
+            </a:ln>
+            <a:effectLst>
+              <a:outerShdw blurRad="57785" dist="33020" dir="3180000" algn="ctr">
+                <a:srgbClr val="000000">
+                  <a:alpha val="30000"/>
+                </a:srgbClr>
+              </a:outerShdw>
+            </a:effectLst>
+            <a:scene3d>
+              <a:camera prst="orthographicFront">
+                <a:rot lat="0" lon="0" rev="0"/>
+              </a:camera>
+              <a:lightRig rig="brightRoom" dir="t">
+                <a:rot lat="0" lon="0" rev="600000"/>
+              </a:lightRig>
+            </a:scene3d>
+            <a:sp3d prstMaterial="metal">
+              <a:bevelT w="190500" h="57150" prst="angle"/>
+            </a:sp3d>
+          </p:spPr>
+          <p:style>
+            <a:lnRef idx="2">
+              <a:schemeClr val="accent1">
+                <a:shade val="50000"/>
+              </a:schemeClr>
+            </a:lnRef>
+            <a:fillRef idx="1">
+              <a:schemeClr val="accent1"/>
+            </a:fillRef>
+            <a:effectRef idx="0">
+              <a:schemeClr val="accent1"/>
+            </a:effectRef>
+            <a:fontRef idx="minor">
+              <a:schemeClr val="lt1"/>
+            </a:fontRef>
+          </p:style>
+          <p:txBody>
+            <a:bodyPr rtlCol="0" anchor="ctr"/>
+            <a:lstStyle/>
+            <a:p>
+              <a:pPr algn="ctr"/>
+              <a:endParaRPr lang="zh-CN" altLang="en-US"/>
+            </a:p>
+          </p:txBody>
+        </p:sp>
+        <p:sp>
+          <p:nvSpPr>
+            <p:cNvPr id="6" name="任意多边形: 形状 5">
+              <a:extLst>
+                <a:ext uri="{FF2B5EF4-FFF2-40B4-BE49-F238E27FC236}">
+                  <a16:creationId xmlns:a16="http://schemas.microsoft.com/office/drawing/2014/main" id="{2D13FC32-7BAF-45AB-8224-130C6641000D}"/>
+                </a:ext>
+              </a:extLst>
+            </p:cNvPr>
+            <p:cNvSpPr/>
+            <p:nvPr/>
+          </p:nvSpPr>
+          <p:spPr>
+            <a:xfrm rot="18900000">
+              <a:off x="4560408" y="9214547"/>
+              <a:ext cx="3950660" cy="2349317"/>
+            </a:xfrm>
+            <a:custGeom>
+              <a:avLst/>
+              <a:gdLst>
+                <a:gd name="connsiteX0" fmla="*/ 2498460 w 4395415"/>
+                <a:gd name="connsiteY0" fmla="*/ 125093 h 2613796"/>
+                <a:gd name="connsiteX1" fmla="*/ 4395415 w 4395415"/>
+                <a:gd name="connsiteY1" fmla="*/ 2022047 h 2613796"/>
+                <a:gd name="connsiteX2" fmla="*/ 4390078 w 4395415"/>
+                <a:gd name="connsiteY2" fmla="*/ 2026871 h 2613796"/>
+                <a:gd name="connsiteX3" fmla="*/ 4072073 w 4395415"/>
+                <a:gd name="connsiteY3" fmla="*/ 2560523 h 2613796"/>
+                <a:gd name="connsiteX4" fmla="*/ 4059067 w 4395415"/>
+                <a:gd name="connsiteY4" fmla="*/ 2613796 h 2613796"/>
+                <a:gd name="connsiteX5" fmla="*/ 337975 w 4395415"/>
+                <a:gd name="connsiteY5" fmla="*/ 2613795 h 2613796"/>
+                <a:gd name="connsiteX6" fmla="*/ 324646 w 4395415"/>
+                <a:gd name="connsiteY6" fmla="*/ 2559204 h 2613796"/>
+                <a:gd name="connsiteX7" fmla="*/ 6641 w 4395415"/>
+                <a:gd name="connsiteY7" fmla="*/ 2025551 h 2613796"/>
+                <a:gd name="connsiteX8" fmla="*/ 0 w 4395415"/>
+                <a:gd name="connsiteY8" fmla="*/ 2019549 h 2613796"/>
+                <a:gd name="connsiteX9" fmla="*/ 1894457 w 4395415"/>
+                <a:gd name="connsiteY9" fmla="*/ 125093 h 2613796"/>
+                <a:gd name="connsiteX10" fmla="*/ 2498460 w 4395415"/>
+                <a:gd name="connsiteY10" fmla="*/ 125093 h 2613796"/>
+              </a:gdLst>
+              <a:ahLst/>
+              <a:cxnLst>
+                <a:cxn ang="0">
+                  <a:pos x="connsiteX0" y="connsiteY0"/>
+                </a:cxn>
+                <a:cxn ang="0">
+                  <a:pos x="connsiteX1" y="connsiteY1"/>
+                </a:cxn>
+                <a:cxn ang="0">
+                  <a:pos x="connsiteX2" y="connsiteY2"/>
+                </a:cxn>
+                <a:cxn ang="0">
+                  <a:pos x="connsiteX3" y="connsiteY3"/>
+                </a:cxn>
+                <a:cxn ang="0">
+                  <a:pos x="connsiteX4" y="connsiteY4"/>
+                </a:cxn>
+                <a:cxn ang="0">
+                  <a:pos x="connsiteX5" y="connsiteY5"/>
+                </a:cxn>
+                <a:cxn ang="0">
+                  <a:pos x="connsiteX6" y="connsiteY6"/>
+                </a:cxn>
+                <a:cxn ang="0">
+                  <a:pos x="connsiteX7" y="connsiteY7"/>
+                </a:cxn>
+                <a:cxn ang="0">
+                  <a:pos x="connsiteX8" y="connsiteY8"/>
+                </a:cxn>
+                <a:cxn ang="0">
+                  <a:pos x="connsiteX9" y="connsiteY9"/>
+                </a:cxn>
+                <a:cxn ang="0">
+                  <a:pos x="connsiteX10" y="connsiteY10"/>
+                </a:cxn>
+              </a:cxnLst>
+              <a:rect l="l" t="t" r="r" b="b"/>
+              <a:pathLst>
+                <a:path w="4395415" h="2613796">
+                  <a:moveTo>
+                    <a:pt x="2498460" y="125093"/>
+                  </a:moveTo>
+                  <a:lnTo>
+                    <a:pt x="4395415" y="2022047"/>
+                  </a:lnTo>
+                  <a:lnTo>
+                    <a:pt x="4390078" y="2026871"/>
+                  </a:lnTo>
+                  <a:cubicBezTo>
+                    <a:pt x="4235894" y="2181055"/>
+                    <a:pt x="4129892" y="2365176"/>
+                    <a:pt x="4072073" y="2560523"/>
+                  </a:cubicBezTo>
+                  <a:lnTo>
+                    <a:pt x="4059067" y="2613796"/>
+                  </a:lnTo>
+                  <a:lnTo>
+                    <a:pt x="337975" y="2613795"/>
+                  </a:lnTo>
+                  <a:lnTo>
+                    <a:pt x="324646" y="2559204"/>
+                  </a:lnTo>
+                  <a:cubicBezTo>
+                    <a:pt x="266827" y="2363857"/>
+                    <a:pt x="160826" y="2179735"/>
+                    <a:pt x="6641" y="2025551"/>
+                  </a:cubicBezTo>
+                  <a:lnTo>
+                    <a:pt x="0" y="2019549"/>
+                  </a:lnTo>
+                  <a:lnTo>
+                    <a:pt x="1894457" y="125093"/>
+                  </a:lnTo>
+                  <a:cubicBezTo>
+                    <a:pt x="2061248" y="-41698"/>
+                    <a:pt x="2331669" y="-41698"/>
+                    <a:pt x="2498460" y="125093"/>
+                  </a:cubicBezTo>
+                  <a:close/>
+                </a:path>
+              </a:pathLst>
+            </a:custGeom>
+            <a:solidFill>
+              <a:srgbClr val="42B4A5"/>
+            </a:solidFill>
+            <a:ln w="254000">
+              <a:solidFill>
+                <a:srgbClr val="F9FAFE"/>
+              </a:solidFill>
+            </a:ln>
+            <a:effectLst>
+              <a:outerShdw blurRad="381000" dist="254000" dir="8100000" algn="tr" rotWithShape="0">
+                <a:srgbClr val="182432">
+                  <a:alpha val="50000"/>
+                </a:srgbClr>
+              </a:outerShdw>
+            </a:effectLst>
+            <a:scene3d>
+              <a:camera prst="orthographicFront">
+                <a:rot lat="0" lon="0" rev="0"/>
+              </a:camera>
+              <a:lightRig rig="brightRoom" dir="t">
+                <a:rot lat="0" lon="0" rev="600000"/>
+              </a:lightRig>
+            </a:scene3d>
+            <a:sp3d prstMaterial="metal">
+              <a:bevelT w="190500" h="57150" prst="angle"/>
+            </a:sp3d>
+          </p:spPr>
+          <p:style>
+            <a:lnRef idx="2">
+              <a:schemeClr val="accent1">
+                <a:shade val="50000"/>
+              </a:schemeClr>
+            </a:lnRef>
+            <a:fillRef idx="1">
+              <a:schemeClr val="accent1"/>
+            </a:fillRef>
+            <a:effectRef idx="0">
+              <a:schemeClr val="accent1"/>
+            </a:effectRef>
+            <a:fontRef idx="minor">
+              <a:schemeClr val="lt1"/>
+            </a:fontRef>
+          </p:style>
+          <p:txBody>
+            <a:bodyPr wrap="square" rtlCol="0" anchor="ctr">
+              <a:noAutofit/>
+            </a:bodyPr>
+            <a:lstStyle/>
+            <a:p>
+              <a:pPr algn="ctr"/>
+              <a:endParaRPr lang="zh-CN" altLang="en-US"/>
+            </a:p>
+          </p:txBody>
+        </p:sp>
+        <p:sp>
+          <p:nvSpPr>
+            <p:cNvPr id="7" name="任意多边形: 形状 6">
+              <a:extLst>
+                <a:ext uri="{FF2B5EF4-FFF2-40B4-BE49-F238E27FC236}">
+                  <a16:creationId xmlns:a16="http://schemas.microsoft.com/office/drawing/2014/main" id="{1A83C70B-0E5C-4B99-939C-2C68DBA9BEB3}"/>
+                </a:ext>
+              </a:extLst>
+            </p:cNvPr>
+            <p:cNvSpPr/>
+            <p:nvPr/>
+          </p:nvSpPr>
+          <p:spPr>
+            <a:xfrm rot="18900000">
+              <a:off x="6604266" y="11245948"/>
+              <a:ext cx="3924310" cy="2349317"/>
+            </a:xfrm>
+            <a:custGeom>
+              <a:avLst/>
+              <a:gdLst>
+                <a:gd name="connsiteX0" fmla="*/ 4037407 w 4366098"/>
+                <a:gd name="connsiteY0" fmla="*/ 1 h 2613796"/>
+                <a:gd name="connsiteX1" fmla="*/ 4057978 w 4366098"/>
+                <a:gd name="connsiteY1" fmla="*/ 84255 h 2613796"/>
+                <a:gd name="connsiteX2" fmla="*/ 4289254 w 4366098"/>
+                <a:gd name="connsiteY2" fmla="*/ 521954 h 2613796"/>
+                <a:gd name="connsiteX3" fmla="*/ 4366098 w 4366098"/>
+                <a:gd name="connsiteY3" fmla="*/ 606971 h 2613796"/>
+                <a:gd name="connsiteX4" fmla="*/ 2484365 w 4366098"/>
+                <a:gd name="connsiteY4" fmla="*/ 2488703 h 2613796"/>
+                <a:gd name="connsiteX5" fmla="*/ 1880362 w 4366098"/>
+                <a:gd name="connsiteY5" fmla="*/ 2488703 h 2613796"/>
+                <a:gd name="connsiteX6" fmla="*/ 0 w 4366098"/>
+                <a:gd name="connsiteY6" fmla="*/ 608342 h 2613796"/>
+                <a:gd name="connsiteX7" fmla="*/ 79275 w 4366098"/>
+                <a:gd name="connsiteY7" fmla="*/ 520635 h 2613796"/>
+                <a:gd name="connsiteX8" fmla="*/ 310551 w 4366098"/>
+                <a:gd name="connsiteY8" fmla="*/ 82935 h 2613796"/>
+                <a:gd name="connsiteX9" fmla="*/ 330801 w 4366098"/>
+                <a:gd name="connsiteY9" fmla="*/ 0 h 2613796"/>
+                <a:gd name="connsiteX10" fmla="*/ 4037407 w 4366098"/>
+                <a:gd name="connsiteY10" fmla="*/ 1 h 2613796"/>
+              </a:gdLst>
+              <a:ahLst/>
+              <a:cxnLst>
+                <a:cxn ang="0">
+                  <a:pos x="connsiteX0" y="connsiteY0"/>
+                </a:cxn>
+                <a:cxn ang="0">
+                  <a:pos x="connsiteX1" y="connsiteY1"/>
+                </a:cxn>
+                <a:cxn ang="0">
+                  <a:pos x="connsiteX2" y="connsiteY2"/>
+                </a:cxn>
+                <a:cxn ang="0">
+                  <a:pos x="connsiteX3" y="connsiteY3"/>
+                </a:cxn>
+                <a:cxn ang="0">
+                  <a:pos x="connsiteX4" y="connsiteY4"/>
+                </a:cxn>
+                <a:cxn ang="0">
+                  <a:pos x="connsiteX5" y="connsiteY5"/>
+                </a:cxn>
+                <a:cxn ang="0">
+                  <a:pos x="connsiteX6" y="connsiteY6"/>
+                </a:cxn>
+                <a:cxn ang="0">
+                  <a:pos x="connsiteX7" y="connsiteY7"/>
+                </a:cxn>
+                <a:cxn ang="0">
+                  <a:pos x="connsiteX8" y="connsiteY8"/>
+                </a:cxn>
+                <a:cxn ang="0">
+                  <a:pos x="connsiteX9" y="connsiteY9"/>
+                </a:cxn>
+                <a:cxn ang="0">
+                  <a:pos x="connsiteX10" y="connsiteY10"/>
+                </a:cxn>
+              </a:cxnLst>
+              <a:rect l="l" t="t" r="r" b="b"/>
+              <a:pathLst>
+                <a:path w="4366098" h="2613796">
+                  <a:moveTo>
+                    <a:pt x="4037407" y="1"/>
+                  </a:moveTo>
+                  <a:lnTo>
+                    <a:pt x="4057978" y="84255"/>
+                  </a:lnTo>
+                  <a:cubicBezTo>
+                    <a:pt x="4104233" y="240532"/>
+                    <a:pt x="4181325" y="389626"/>
+                    <a:pt x="4289254" y="521954"/>
+                  </a:cubicBezTo>
+                  <a:lnTo>
+                    <a:pt x="4366098" y="606971"/>
+                  </a:lnTo>
+                  <a:lnTo>
+                    <a:pt x="2484365" y="2488703"/>
+                  </a:lnTo>
+                  <a:cubicBezTo>
+                    <a:pt x="2317574" y="2655494"/>
+                    <a:pt x="2047153" y="2655494"/>
+                    <a:pt x="1880362" y="2488703"/>
+                  </a:cubicBezTo>
+                  <a:lnTo>
+                    <a:pt x="0" y="608342"/>
+                  </a:lnTo>
+                  <a:lnTo>
+                    <a:pt x="79275" y="520635"/>
+                  </a:lnTo>
+                  <a:cubicBezTo>
+                    <a:pt x="187204" y="388306"/>
+                    <a:pt x="264296" y="239213"/>
+                    <a:pt x="310551" y="82935"/>
+                  </a:cubicBezTo>
+                  <a:lnTo>
+                    <a:pt x="330801" y="0"/>
+                  </a:lnTo>
+                  <a:lnTo>
+                    <a:pt x="4037407" y="1"/>
+                  </a:lnTo>
+                  <a:close/>
+                </a:path>
+              </a:pathLst>
+            </a:custGeom>
+            <a:solidFill>
+              <a:srgbClr val="EAD49A"/>
+            </a:solidFill>
+            <a:ln w="254000">
+              <a:solidFill>
+                <a:srgbClr val="F9FAFE"/>
+              </a:solidFill>
+              <a:prstDash val="solid"/>
+            </a:ln>
+            <a:effectLst>
+              <a:outerShdw blurRad="381000" dist="254000" dir="8100000" algn="tl" rotWithShape="0">
+                <a:srgbClr val="182432">
+                  <a:alpha val="50000"/>
+                </a:srgbClr>
+              </a:outerShdw>
+            </a:effectLst>
+            <a:scene3d>
+              <a:camera prst="orthographicFront">
+                <a:rot lat="0" lon="0" rev="0"/>
+              </a:camera>
+              <a:lightRig rig="brightRoom" dir="t">
+                <a:rot lat="0" lon="0" rev="600000"/>
+              </a:lightRig>
+            </a:scene3d>
+            <a:sp3d prstMaterial="metal">
+              <a:bevelT w="190500" h="57150" prst="angle"/>
+            </a:sp3d>
+          </p:spPr>
+          <p:style>
+            <a:lnRef idx="2">
+              <a:schemeClr val="accent1">
+                <a:shade val="50000"/>
+              </a:schemeClr>
+            </a:lnRef>
+            <a:fillRef idx="1">
+              <a:schemeClr val="accent1"/>
+            </a:fillRef>
+            <a:effectRef idx="0">
+              <a:schemeClr val="accent1"/>
+            </a:effectRef>
+            <a:fontRef idx="minor">
+              <a:schemeClr val="lt1"/>
+            </a:fontRef>
+          </p:style>
+          <p:txBody>
+            <a:bodyPr wrap="square" rtlCol="0" anchor="ctr">
+              <a:noAutofit/>
+            </a:bodyPr>
+            <a:lstStyle/>
+            <a:p>
+              <a:pPr algn="ctr"/>
+              <a:endParaRPr lang="zh-CN" altLang="en-US" dirty="0"/>
+            </a:p>
+          </p:txBody>
+        </p:sp>
+        <p:sp>
+          <p:nvSpPr>
+            <p:cNvPr id="8" name="椭圆 7">
+              <a:extLst>
+                <a:ext uri="{FF2B5EF4-FFF2-40B4-BE49-F238E27FC236}">
+                  <a16:creationId xmlns:a16="http://schemas.microsoft.com/office/drawing/2014/main" id="{16C66B7A-EBCD-4662-9205-18F0E09CE6E2}"/>
+                </a:ext>
+              </a:extLst>
+            </p:cNvPr>
+            <p:cNvSpPr>
+              <a:spLocks noChangeAspect="1"/>
+            </p:cNvSpPr>
+            <p:nvPr/>
+          </p:nvSpPr>
+          <p:spPr>
+            <a:xfrm>
+              <a:off x="8852435" y="9184150"/>
+              <a:ext cx="900000" cy="900000"/>
+            </a:xfrm>
+            <a:prstGeom prst="ellipse">
+              <a:avLst/>
+            </a:prstGeom>
+            <a:solidFill>
+              <a:srgbClr val="FF0000"/>
+            </a:solidFill>
+            <a:ln w="38100">
+              <a:solidFill>
+                <a:srgbClr val="F9FAFE"/>
+              </a:solidFill>
+            </a:ln>
+            <a:effectLst>
+              <a:outerShdw blurRad="149987" dist="250190" dir="8460000" algn="ctr">
+                <a:srgbClr val="000000">
+                  <a:alpha val="28000"/>
+                </a:srgbClr>
+              </a:outerShdw>
+            </a:effectLst>
+            <a:scene3d>
+              <a:camera prst="orthographicFront">
+                <a:rot lat="0" lon="0" rev="0"/>
+              </a:camera>
+              <a:lightRig rig="contrasting" dir="t">
+                <a:rot lat="0" lon="0" rev="1500000"/>
+              </a:lightRig>
+            </a:scene3d>
+            <a:sp3d prstMaterial="metal">
+              <a:bevelT w="88900" h="88900"/>
+            </a:sp3d>
+          </p:spPr>
+          <p:style>
+            <a:lnRef idx="2">
+              <a:schemeClr val="accent1">
+                <a:shade val="50000"/>
+              </a:schemeClr>
+            </a:lnRef>
+            <a:fillRef idx="1">
+              <a:schemeClr val="accent1"/>
+            </a:fillRef>
+            <a:effectRef idx="0">
+              <a:schemeClr val="accent1"/>
+            </a:effectRef>
+            <a:fontRef idx="minor">
+              <a:schemeClr val="lt1"/>
+            </a:fontRef>
+          </p:style>
+          <p:txBody>
+            <a:bodyPr rtlCol="0" anchor="ctr"/>
+            <a:lstStyle/>
+            <a:p>
+              <a:pPr algn="ctr"/>
+              <a:endParaRPr lang="zh-CN" altLang="en-US"/>
+            </a:p>
+          </p:txBody>
+        </p:sp>
+        <p:sp>
+          <p:nvSpPr>
+            <p:cNvPr id="9" name="椭圆 8">
+              <a:extLst>
+                <a:ext uri="{FF2B5EF4-FFF2-40B4-BE49-F238E27FC236}">
+                  <a16:creationId xmlns:a16="http://schemas.microsoft.com/office/drawing/2014/main" id="{1F7ACDF9-9036-4FB1-A9EC-C5EF7F4D1D33}"/>
+                </a:ext>
+              </a:extLst>
+            </p:cNvPr>
+            <p:cNvSpPr>
+              <a:spLocks noChangeAspect="1"/>
+            </p:cNvSpPr>
+            <p:nvPr/>
+          </p:nvSpPr>
+          <p:spPr>
+            <a:xfrm>
+              <a:off x="5323539" y="12734417"/>
+              <a:ext cx="900000" cy="900000"/>
+            </a:xfrm>
+            <a:prstGeom prst="ellipse">
+              <a:avLst/>
+            </a:prstGeom>
+            <a:solidFill>
+              <a:schemeClr val="accent6"/>
+            </a:solidFill>
+            <a:ln w="38100">
+              <a:solidFill>
+                <a:srgbClr val="F9FAFE"/>
+              </a:solidFill>
+            </a:ln>
+            <a:effectLst>
+              <a:outerShdw blurRad="149987" dist="250190" dir="8460000" algn="ctr">
+                <a:srgbClr val="000000">
+                  <a:alpha val="28000"/>
+                </a:srgbClr>
+              </a:outerShdw>
+            </a:effectLst>
+            <a:scene3d>
+              <a:camera prst="orthographicFront">
+                <a:rot lat="0" lon="0" rev="0"/>
+              </a:camera>
+              <a:lightRig rig="contrasting" dir="t">
+                <a:rot lat="0" lon="0" rev="1500000"/>
+              </a:lightRig>
+            </a:scene3d>
+            <a:sp3d prstMaterial="metal">
+              <a:bevelT w="88900" h="88900"/>
+            </a:sp3d>
+          </p:spPr>
+          <p:style>
+            <a:lnRef idx="2">
+              <a:schemeClr val="accent1">
+                <a:shade val="50000"/>
+              </a:schemeClr>
+            </a:lnRef>
+            <a:fillRef idx="1">
+              <a:schemeClr val="accent1"/>
+            </a:fillRef>
+            <a:effectRef idx="0">
+              <a:schemeClr val="accent1"/>
+            </a:effectRef>
+            <a:fontRef idx="minor">
+              <a:schemeClr val="lt1"/>
+            </a:fontRef>
+          </p:style>
+          <p:txBody>
+            <a:bodyPr rtlCol="0" anchor="ctr"/>
+            <a:lstStyle/>
+            <a:p>
+              <a:pPr algn="ctr"/>
+              <a:endParaRPr lang="zh-CN" altLang="en-US"/>
+            </a:p>
+          </p:txBody>
+        </p:sp>
+      </p:grpSp>
+    </p:spTree>
+    <p:extLst>
+      <p:ext uri="{BB962C8B-B14F-4D97-AF65-F5344CB8AC3E}">
+        <p14:creationId xmlns:p14="http://schemas.microsoft.com/office/powerpoint/2010/main" val="103229023"/>
+      </p:ext>
+    </p:extLst>
+  </p:cSld>
+  <p:clrMapOvr>
+    <a:masterClrMapping/>
+  </p:clrMapOvr>
+</p:sld>
+</file>
+
+<file path=ppt/slides/slide5.xml><?xml version="1.0" encoding="utf-8"?>
+<p:sld xmlns:a="http://schemas.openxmlformats.org/drawingml/2006/main" xmlns:r="http://schemas.openxmlformats.org/officeDocument/2006/relationships" xmlns:p="http://schemas.openxmlformats.org/presentationml/2006/main">
+  <p:cSld>
+    <p:spTree>
+      <p:nvGrpSpPr>
+        <p:cNvPr id="1" name=""/>
+        <p:cNvGrpSpPr/>
+        <p:nvPr/>
+      </p:nvGrpSpPr>
+      <p:grpSpPr>
+        <a:xfrm>
+          <a:off x="0" y="0"/>
+          <a:ext cx="0" cy="0"/>
+          <a:chOff x="0" y="0"/>
+          <a:chExt cx="0" cy="0"/>
+        </a:xfrm>
+      </p:grpSpPr>
+      <p:grpSp>
+        <p:nvGrpSpPr>
+          <p:cNvPr id="10" name="组合 9">
+            <a:extLst>
+              <a:ext uri="{FF2B5EF4-FFF2-40B4-BE49-F238E27FC236}">
+                <a16:creationId xmlns:a16="http://schemas.microsoft.com/office/drawing/2014/main" id="{9D890DE6-F394-44C1-87BB-D89E413D7735}"/>
+              </a:ext>
+            </a:extLst>
+          </p:cNvPr>
+          <p:cNvGrpSpPr/>
+          <p:nvPr/>
+        </p:nvGrpSpPr>
+        <p:grpSpPr>
+          <a:xfrm>
+            <a:off x="3114446" y="916900"/>
+            <a:ext cx="5409523" cy="5409523"/>
+            <a:chOff x="15937818" y="8754615"/>
+            <a:chExt cx="5409523" cy="5409523"/>
+          </a:xfrm>
+        </p:grpSpPr>
+        <p:sp>
+          <p:nvSpPr>
+            <p:cNvPr id="4" name="矩形: 圆角 3">
+              <a:extLst>
+                <a:ext uri="{FF2B5EF4-FFF2-40B4-BE49-F238E27FC236}">
+                  <a16:creationId xmlns:a16="http://schemas.microsoft.com/office/drawing/2014/main" id="{7A708835-26C8-4CAA-883D-A17CEEE59C3C}"/>
+                </a:ext>
+              </a:extLst>
+            </p:cNvPr>
+            <p:cNvSpPr/>
+            <p:nvPr/>
+          </p:nvSpPr>
+          <p:spPr>
+            <a:xfrm>
+              <a:off x="15937818" y="8754615"/>
+              <a:ext cx="5409523" cy="5409523"/>
+            </a:xfrm>
+            <a:prstGeom prst="roundRect">
+              <a:avLst>
+                <a:gd name="adj" fmla="val 9800"/>
+              </a:avLst>
+            </a:prstGeom>
+            <a:solidFill>
+              <a:srgbClr val="79DB9F"/>
+            </a:solidFill>
+            <a:ln w="508000">
+              <a:solidFill>
+                <a:srgbClr val="FCBC50"/>
+              </a:solidFill>
+            </a:ln>
+            <a:effectLst>
+              <a:outerShdw blurRad="57785" dist="33020" dir="3180000" algn="ctr">
+                <a:srgbClr val="000000">
+                  <a:alpha val="30000"/>
+                </a:srgbClr>
+              </a:outerShdw>
+            </a:effectLst>
+            <a:scene3d>
+              <a:camera prst="orthographicFront">
+                <a:rot lat="0" lon="0" rev="0"/>
+              </a:camera>
+              <a:lightRig rig="brightRoom" dir="t">
+                <a:rot lat="0" lon="0" rev="600000"/>
+              </a:lightRig>
+            </a:scene3d>
+            <a:sp3d prstMaterial="metal">
+              <a:bevelT w="190500" h="57150" prst="angle"/>
+            </a:sp3d>
+          </p:spPr>
+          <p:style>
+            <a:lnRef idx="2">
+              <a:schemeClr val="accent1">
+                <a:shade val="50000"/>
+              </a:schemeClr>
+            </a:lnRef>
+            <a:fillRef idx="1">
+              <a:schemeClr val="accent1"/>
+            </a:fillRef>
+            <a:effectRef idx="0">
+              <a:schemeClr val="accent1"/>
+            </a:effectRef>
+            <a:fontRef idx="minor">
+              <a:schemeClr val="lt1"/>
+            </a:fontRef>
+          </p:style>
+          <p:txBody>
+            <a:bodyPr rtlCol="0" anchor="ctr"/>
+            <a:lstStyle/>
+            <a:p>
+              <a:pPr algn="ctr"/>
+              <a:endParaRPr lang="zh-CN" altLang="en-US"/>
+            </a:p>
+          </p:txBody>
+        </p:sp>
+        <p:grpSp>
+          <p:nvGrpSpPr>
+            <p:cNvPr id="5" name="组合 4">
+              <a:extLst>
+                <a:ext uri="{FF2B5EF4-FFF2-40B4-BE49-F238E27FC236}">
+                  <a16:creationId xmlns:a16="http://schemas.microsoft.com/office/drawing/2014/main" id="{1F96BAAF-059F-4DA7-B46F-CF2017720528}"/>
+                </a:ext>
+              </a:extLst>
+            </p:cNvPr>
+            <p:cNvGrpSpPr/>
+            <p:nvPr/>
+          </p:nvGrpSpPr>
+          <p:grpSpPr>
+            <a:xfrm>
+              <a:off x="16043575" y="9500235"/>
+              <a:ext cx="5198008" cy="3918283"/>
+              <a:chOff x="16057796" y="9461491"/>
+              <a:chExt cx="5198008" cy="3918283"/>
+            </a:xfrm>
+          </p:grpSpPr>
+          <p:sp>
+            <p:nvSpPr>
+              <p:cNvPr id="6" name="任意多边形: 形状 5">
+                <a:extLst>
+                  <a:ext uri="{FF2B5EF4-FFF2-40B4-BE49-F238E27FC236}">
+                    <a16:creationId xmlns:a16="http://schemas.microsoft.com/office/drawing/2014/main" id="{53A1ACFC-614C-4590-A276-024A7536F09D}"/>
+                  </a:ext>
+                </a:extLst>
+              </p:cNvPr>
+              <p:cNvSpPr/>
+              <p:nvPr/>
+            </p:nvSpPr>
+            <p:spPr>
+              <a:xfrm rot="18900000">
+                <a:off x="16057796" y="9461491"/>
+                <a:ext cx="3176091" cy="1888708"/>
+              </a:xfrm>
+              <a:custGeom>
+                <a:avLst/>
+                <a:gdLst>
+                  <a:gd name="connsiteX0" fmla="*/ 2498460 w 4395415"/>
+                  <a:gd name="connsiteY0" fmla="*/ 125093 h 2613796"/>
+                  <a:gd name="connsiteX1" fmla="*/ 4395415 w 4395415"/>
+                  <a:gd name="connsiteY1" fmla="*/ 2022047 h 2613796"/>
+                  <a:gd name="connsiteX2" fmla="*/ 4390078 w 4395415"/>
+                  <a:gd name="connsiteY2" fmla="*/ 2026871 h 2613796"/>
+                  <a:gd name="connsiteX3" fmla="*/ 4072073 w 4395415"/>
+                  <a:gd name="connsiteY3" fmla="*/ 2560523 h 2613796"/>
+                  <a:gd name="connsiteX4" fmla="*/ 4059067 w 4395415"/>
+                  <a:gd name="connsiteY4" fmla="*/ 2613796 h 2613796"/>
+                  <a:gd name="connsiteX5" fmla="*/ 337975 w 4395415"/>
+                  <a:gd name="connsiteY5" fmla="*/ 2613795 h 2613796"/>
+                  <a:gd name="connsiteX6" fmla="*/ 324646 w 4395415"/>
+                  <a:gd name="connsiteY6" fmla="*/ 2559204 h 2613796"/>
+                  <a:gd name="connsiteX7" fmla="*/ 6641 w 4395415"/>
+                  <a:gd name="connsiteY7" fmla="*/ 2025551 h 2613796"/>
+                  <a:gd name="connsiteX8" fmla="*/ 0 w 4395415"/>
+                  <a:gd name="connsiteY8" fmla="*/ 2019549 h 2613796"/>
+                  <a:gd name="connsiteX9" fmla="*/ 1894457 w 4395415"/>
+                  <a:gd name="connsiteY9" fmla="*/ 125093 h 2613796"/>
+                  <a:gd name="connsiteX10" fmla="*/ 2498460 w 4395415"/>
+                  <a:gd name="connsiteY10" fmla="*/ 125093 h 2613796"/>
+                </a:gdLst>
+                <a:ahLst/>
+                <a:cxnLst>
+                  <a:cxn ang="0">
+                    <a:pos x="connsiteX0" y="connsiteY0"/>
+                  </a:cxn>
+                  <a:cxn ang="0">
+                    <a:pos x="connsiteX1" y="connsiteY1"/>
+                  </a:cxn>
+                  <a:cxn ang="0">
+                    <a:pos x="connsiteX2" y="connsiteY2"/>
+                  </a:cxn>
+                  <a:cxn ang="0">
+                    <a:pos x="connsiteX3" y="connsiteY3"/>
+                  </a:cxn>
+                  <a:cxn ang="0">
+                    <a:pos x="connsiteX4" y="connsiteY4"/>
+                  </a:cxn>
+                  <a:cxn ang="0">
+                    <a:pos x="connsiteX5" y="connsiteY5"/>
+                  </a:cxn>
+                  <a:cxn ang="0">
+                    <a:pos x="connsiteX6" y="connsiteY6"/>
+                  </a:cxn>
+                  <a:cxn ang="0">
+                    <a:pos x="connsiteX7" y="connsiteY7"/>
+                  </a:cxn>
+                  <a:cxn ang="0">
+                    <a:pos x="connsiteX8" y="connsiteY8"/>
+                  </a:cxn>
+                  <a:cxn ang="0">
+                    <a:pos x="connsiteX9" y="connsiteY9"/>
+                  </a:cxn>
+                  <a:cxn ang="0">
+                    <a:pos x="connsiteX10" y="connsiteY10"/>
+                  </a:cxn>
+                </a:cxnLst>
+                <a:rect l="l" t="t" r="r" b="b"/>
+                <a:pathLst>
+                  <a:path w="4395415" h="2613796">
+                    <a:moveTo>
+                      <a:pt x="2498460" y="125093"/>
+                    </a:moveTo>
+                    <a:lnTo>
+                      <a:pt x="4395415" y="2022047"/>
+                    </a:lnTo>
+                    <a:lnTo>
+                      <a:pt x="4390078" y="2026871"/>
+                    </a:lnTo>
+                    <a:cubicBezTo>
+                      <a:pt x="4235894" y="2181055"/>
+                      <a:pt x="4129892" y="2365176"/>
+                      <a:pt x="4072073" y="2560523"/>
+                    </a:cubicBezTo>
+                    <a:lnTo>
+                      <a:pt x="4059067" y="2613796"/>
+                    </a:lnTo>
+                    <a:lnTo>
+                      <a:pt x="337975" y="2613795"/>
+                    </a:lnTo>
+                    <a:lnTo>
+                      <a:pt x="324646" y="2559204"/>
+                    </a:lnTo>
+                    <a:cubicBezTo>
+                      <a:pt x="266827" y="2363857"/>
+                      <a:pt x="160826" y="2179735"/>
+                      <a:pt x="6641" y="2025551"/>
+                    </a:cubicBezTo>
+                    <a:lnTo>
+                      <a:pt x="0" y="2019549"/>
+                    </a:lnTo>
+                    <a:lnTo>
+                      <a:pt x="1894457" y="125093"/>
+                    </a:lnTo>
+                    <a:cubicBezTo>
+                      <a:pt x="2061248" y="-41698"/>
+                      <a:pt x="2331669" y="-41698"/>
+                      <a:pt x="2498460" y="125093"/>
+                    </a:cubicBezTo>
+                    <a:close/>
+                  </a:path>
+                </a:pathLst>
+              </a:custGeom>
+              <a:solidFill>
+                <a:srgbClr val="42B4A5"/>
+              </a:solidFill>
+              <a:ln w="254000">
+                <a:solidFill>
+                  <a:srgbClr val="F9FAFE"/>
+                </a:solidFill>
+              </a:ln>
+              <a:effectLst>
+                <a:outerShdw blurRad="381000" dist="254000" dir="8100000" algn="tr" rotWithShape="0">
+                  <a:srgbClr val="182432">
+                    <a:alpha val="50000"/>
+                  </a:srgbClr>
+                </a:outerShdw>
+              </a:effectLst>
+              <a:scene3d>
+                <a:camera prst="orthographicFront">
+                  <a:rot lat="0" lon="0" rev="0"/>
+                </a:camera>
+                <a:lightRig rig="brightRoom" dir="t">
+                  <a:rot lat="0" lon="0" rev="600000"/>
+                </a:lightRig>
+              </a:scene3d>
+              <a:sp3d prstMaterial="metal">
+                <a:bevelT w="190500" h="57150" prst="angle"/>
+              </a:sp3d>
+            </p:spPr>
+            <p:style>
+              <a:lnRef idx="2">
+                <a:schemeClr val="accent1">
+                  <a:shade val="50000"/>
+                </a:schemeClr>
+              </a:lnRef>
+              <a:fillRef idx="1">
+                <a:schemeClr val="accent1"/>
+              </a:fillRef>
+              <a:effectRef idx="0">
+                <a:schemeClr val="accent1"/>
+              </a:effectRef>
+              <a:fontRef idx="minor">
+                <a:schemeClr val="lt1"/>
+              </a:fontRef>
+            </p:style>
+            <p:txBody>
+              <a:bodyPr wrap="square" rtlCol="0" anchor="ctr">
+                <a:noAutofit/>
+              </a:bodyPr>
+              <a:lstStyle/>
+              <a:p>
+                <a:pPr algn="ctr"/>
+                <a:endParaRPr lang="zh-CN" altLang="en-US"/>
+              </a:p>
+            </p:txBody>
+          </p:sp>
+          <p:sp>
+            <p:nvSpPr>
+              <p:cNvPr id="7" name="任意多边形: 形状 6">
+                <a:extLst>
+                  <a:ext uri="{FF2B5EF4-FFF2-40B4-BE49-F238E27FC236}">
+                    <a16:creationId xmlns:a16="http://schemas.microsoft.com/office/drawing/2014/main" id="{02B5E314-37A3-40A6-8844-2C0B4BFA3401}"/>
+                  </a:ext>
+                </a:extLst>
+              </p:cNvPr>
+              <p:cNvSpPr/>
+              <p:nvPr/>
+            </p:nvSpPr>
+            <p:spPr>
+              <a:xfrm rot="18900000">
+                <a:off x="18100897" y="11491066"/>
+                <a:ext cx="3154907" cy="1888708"/>
+              </a:xfrm>
+              <a:custGeom>
+                <a:avLst/>
+                <a:gdLst>
+                  <a:gd name="connsiteX0" fmla="*/ 4037407 w 4366098"/>
+                  <a:gd name="connsiteY0" fmla="*/ 1 h 2613796"/>
+                  <a:gd name="connsiteX1" fmla="*/ 4057978 w 4366098"/>
+                  <a:gd name="connsiteY1" fmla="*/ 84255 h 2613796"/>
+                  <a:gd name="connsiteX2" fmla="*/ 4289254 w 4366098"/>
+                  <a:gd name="connsiteY2" fmla="*/ 521954 h 2613796"/>
+                  <a:gd name="connsiteX3" fmla="*/ 4366098 w 4366098"/>
+                  <a:gd name="connsiteY3" fmla="*/ 606971 h 2613796"/>
+                  <a:gd name="connsiteX4" fmla="*/ 2484365 w 4366098"/>
+                  <a:gd name="connsiteY4" fmla="*/ 2488703 h 2613796"/>
+                  <a:gd name="connsiteX5" fmla="*/ 1880362 w 4366098"/>
+                  <a:gd name="connsiteY5" fmla="*/ 2488703 h 2613796"/>
+                  <a:gd name="connsiteX6" fmla="*/ 0 w 4366098"/>
+                  <a:gd name="connsiteY6" fmla="*/ 608342 h 2613796"/>
+                  <a:gd name="connsiteX7" fmla="*/ 79275 w 4366098"/>
+                  <a:gd name="connsiteY7" fmla="*/ 520635 h 2613796"/>
+                  <a:gd name="connsiteX8" fmla="*/ 310551 w 4366098"/>
+                  <a:gd name="connsiteY8" fmla="*/ 82935 h 2613796"/>
+                  <a:gd name="connsiteX9" fmla="*/ 330801 w 4366098"/>
+                  <a:gd name="connsiteY9" fmla="*/ 0 h 2613796"/>
+                  <a:gd name="connsiteX10" fmla="*/ 4037407 w 4366098"/>
+                  <a:gd name="connsiteY10" fmla="*/ 1 h 2613796"/>
+                </a:gdLst>
+                <a:ahLst/>
+                <a:cxnLst>
+                  <a:cxn ang="0">
+                    <a:pos x="connsiteX0" y="connsiteY0"/>
+                  </a:cxn>
+                  <a:cxn ang="0">
+                    <a:pos x="connsiteX1" y="connsiteY1"/>
+                  </a:cxn>
+                  <a:cxn ang="0">
+                    <a:pos x="connsiteX2" y="connsiteY2"/>
+                  </a:cxn>
+                  <a:cxn ang="0">
+                    <a:pos x="connsiteX3" y="connsiteY3"/>
+                  </a:cxn>
+                  <a:cxn ang="0">
+                    <a:pos x="connsiteX4" y="connsiteY4"/>
+                  </a:cxn>
+                  <a:cxn ang="0">
+                    <a:pos x="connsiteX5" y="connsiteY5"/>
+                  </a:cxn>
+                  <a:cxn ang="0">
+                    <a:pos x="connsiteX6" y="connsiteY6"/>
+                  </a:cxn>
+                  <a:cxn ang="0">
+                    <a:pos x="connsiteX7" y="connsiteY7"/>
+                  </a:cxn>
+                  <a:cxn ang="0">
+                    <a:pos x="connsiteX8" y="connsiteY8"/>
+                  </a:cxn>
+                  <a:cxn ang="0">
+                    <a:pos x="connsiteX9" y="connsiteY9"/>
+                  </a:cxn>
+                  <a:cxn ang="0">
+                    <a:pos x="connsiteX10" y="connsiteY10"/>
+                  </a:cxn>
+                </a:cxnLst>
+                <a:rect l="l" t="t" r="r" b="b"/>
+                <a:pathLst>
+                  <a:path w="4366098" h="2613796">
+                    <a:moveTo>
+                      <a:pt x="4037407" y="1"/>
+                    </a:moveTo>
+                    <a:lnTo>
+                      <a:pt x="4057978" y="84255"/>
+                    </a:lnTo>
+                    <a:cubicBezTo>
+                      <a:pt x="4104233" y="240532"/>
+                      <a:pt x="4181325" y="389626"/>
+                      <a:pt x="4289254" y="521954"/>
+                    </a:cubicBezTo>
+                    <a:lnTo>
+                      <a:pt x="4366098" y="606971"/>
+                    </a:lnTo>
+                    <a:lnTo>
+                      <a:pt x="2484365" y="2488703"/>
+                    </a:lnTo>
+                    <a:cubicBezTo>
+                      <a:pt x="2317574" y="2655494"/>
+                      <a:pt x="2047153" y="2655494"/>
+                      <a:pt x="1880362" y="2488703"/>
+                    </a:cubicBezTo>
+                    <a:lnTo>
+                      <a:pt x="0" y="608342"/>
+                    </a:lnTo>
+                    <a:lnTo>
+                      <a:pt x="79275" y="520635"/>
+                    </a:lnTo>
+                    <a:cubicBezTo>
+                      <a:pt x="187204" y="388306"/>
+                      <a:pt x="264296" y="239213"/>
+                      <a:pt x="310551" y="82935"/>
+                    </a:cubicBezTo>
+                    <a:lnTo>
+                      <a:pt x="330801" y="0"/>
+                    </a:lnTo>
+                    <a:lnTo>
+                      <a:pt x="4037407" y="1"/>
+                    </a:lnTo>
+                    <a:close/>
+                  </a:path>
+                </a:pathLst>
+              </a:custGeom>
+              <a:solidFill>
+                <a:srgbClr val="EAD49A"/>
+              </a:solidFill>
+              <a:ln w="254000">
+                <a:solidFill>
+                  <a:srgbClr val="F9FAFE"/>
+                </a:solidFill>
+                <a:prstDash val="solid"/>
+              </a:ln>
+              <a:effectLst>
+                <a:outerShdw blurRad="381000" dist="254000" dir="8100000" algn="tl" rotWithShape="0">
+                  <a:srgbClr val="182432">
+                    <a:alpha val="50000"/>
+                  </a:srgbClr>
+                </a:outerShdw>
+              </a:effectLst>
+              <a:scene3d>
+                <a:camera prst="orthographicFront">
+                  <a:rot lat="0" lon="0" rev="0"/>
+                </a:camera>
+                <a:lightRig rig="brightRoom" dir="t">
+                  <a:rot lat="0" lon="0" rev="600000"/>
+                </a:lightRig>
+              </a:scene3d>
+              <a:sp3d prstMaterial="metal">
+                <a:bevelT w="190500" h="57150" prst="angle"/>
+              </a:sp3d>
+            </p:spPr>
+            <p:style>
+              <a:lnRef idx="2">
+                <a:schemeClr val="accent1">
+                  <a:shade val="50000"/>
+                </a:schemeClr>
+              </a:lnRef>
+              <a:fillRef idx="1">
+                <a:schemeClr val="accent1"/>
+              </a:fillRef>
+              <a:effectRef idx="0">
+                <a:schemeClr val="accent1"/>
+              </a:effectRef>
+              <a:fontRef idx="minor">
+                <a:schemeClr val="lt1"/>
+              </a:fontRef>
+            </p:style>
+            <p:txBody>
+              <a:bodyPr wrap="square" rtlCol="0" anchor="ctr">
+                <a:noAutofit/>
+              </a:bodyPr>
+              <a:lstStyle/>
+              <a:p>
+                <a:pPr algn="ctr"/>
+                <a:endParaRPr lang="zh-CN" altLang="en-US" dirty="0"/>
+              </a:p>
+            </p:txBody>
+          </p:sp>
+        </p:grpSp>
+        <p:sp>
+          <p:nvSpPr>
+            <p:cNvPr id="8" name="椭圆 7">
+              <a:extLst>
+                <a:ext uri="{FF2B5EF4-FFF2-40B4-BE49-F238E27FC236}">
+                  <a16:creationId xmlns:a16="http://schemas.microsoft.com/office/drawing/2014/main" id="{5E660240-FF2E-42B1-B22B-8836CF6A0A62}"/>
+                </a:ext>
+              </a:extLst>
+            </p:cNvPr>
+            <p:cNvSpPr>
+              <a:spLocks noChangeAspect="1"/>
+            </p:cNvSpPr>
+            <p:nvPr/>
+          </p:nvSpPr>
+          <p:spPr>
+            <a:xfrm>
+              <a:off x="19804630" y="9375754"/>
+              <a:ext cx="900000" cy="900000"/>
+            </a:xfrm>
+            <a:prstGeom prst="ellipse">
+              <a:avLst/>
+            </a:prstGeom>
+            <a:solidFill>
+              <a:srgbClr val="FF0000"/>
+            </a:solidFill>
+            <a:ln w="38100">
+              <a:solidFill>
+                <a:srgbClr val="F9FAFE"/>
+              </a:solidFill>
+            </a:ln>
+            <a:effectLst>
+              <a:outerShdw blurRad="149987" dist="250190" dir="8460000" algn="ctr">
+                <a:srgbClr val="000000">
+                  <a:alpha val="28000"/>
+                </a:srgbClr>
+              </a:outerShdw>
+            </a:effectLst>
+            <a:scene3d>
+              <a:camera prst="orthographicFront">
+                <a:rot lat="0" lon="0" rev="0"/>
+              </a:camera>
+              <a:lightRig rig="contrasting" dir="t">
+                <a:rot lat="0" lon="0" rev="1500000"/>
+              </a:lightRig>
+            </a:scene3d>
+            <a:sp3d prstMaterial="metal">
+              <a:bevelT w="88900" h="88900"/>
+            </a:sp3d>
+          </p:spPr>
+          <p:style>
+            <a:lnRef idx="2">
+              <a:schemeClr val="accent1">
+                <a:shade val="50000"/>
+              </a:schemeClr>
+            </a:lnRef>
+            <a:fillRef idx="1">
+              <a:schemeClr val="accent1"/>
+            </a:fillRef>
+            <a:effectRef idx="0">
+              <a:schemeClr val="accent1"/>
+            </a:effectRef>
+            <a:fontRef idx="minor">
+              <a:schemeClr val="lt1"/>
+            </a:fontRef>
+          </p:style>
+          <p:txBody>
+            <a:bodyPr rtlCol="0" anchor="ctr"/>
+            <a:lstStyle/>
+            <a:p>
+              <a:pPr algn="ctr"/>
+              <a:endParaRPr lang="zh-CN" altLang="en-US"/>
+            </a:p>
+          </p:txBody>
+        </p:sp>
+        <p:sp>
+          <p:nvSpPr>
+            <p:cNvPr id="9" name="椭圆 8">
+              <a:extLst>
+                <a:ext uri="{FF2B5EF4-FFF2-40B4-BE49-F238E27FC236}">
+                  <a16:creationId xmlns:a16="http://schemas.microsoft.com/office/drawing/2014/main" id="{F29C0E30-89F9-4010-BBA2-251D4267208C}"/>
+                </a:ext>
+              </a:extLst>
+            </p:cNvPr>
+            <p:cNvSpPr>
+              <a:spLocks noChangeAspect="1"/>
+            </p:cNvSpPr>
+            <p:nvPr/>
+          </p:nvSpPr>
+          <p:spPr>
+            <a:xfrm>
+              <a:off x="16580528" y="12642998"/>
+              <a:ext cx="900000" cy="900000"/>
+            </a:xfrm>
+            <a:prstGeom prst="ellipse">
+              <a:avLst/>
+            </a:prstGeom>
+            <a:solidFill>
+              <a:srgbClr val="7030A0"/>
+            </a:solidFill>
+            <a:ln w="38100">
+              <a:solidFill>
+                <a:srgbClr val="F9FAFE"/>
+              </a:solidFill>
+            </a:ln>
+            <a:effectLst>
+              <a:outerShdw blurRad="149987" dist="250190" dir="8460000" algn="ctr">
+                <a:srgbClr val="000000">
+                  <a:alpha val="28000"/>
+                </a:srgbClr>
+              </a:outerShdw>
+            </a:effectLst>
+            <a:scene3d>
+              <a:camera prst="orthographicFront">
+                <a:rot lat="0" lon="0" rev="0"/>
+              </a:camera>
+              <a:lightRig rig="contrasting" dir="t">
+                <a:rot lat="0" lon="0" rev="1500000"/>
+              </a:lightRig>
+            </a:scene3d>
+            <a:sp3d prstMaterial="metal">
+              <a:bevelT w="88900" h="88900"/>
+            </a:sp3d>
+          </p:spPr>
+          <p:style>
+            <a:lnRef idx="2">
+              <a:schemeClr val="accent1">
+                <a:shade val="50000"/>
+              </a:schemeClr>
+            </a:lnRef>
+            <a:fillRef idx="1">
+              <a:schemeClr val="accent1"/>
+            </a:fillRef>
+            <a:effectRef idx="0">
+              <a:schemeClr val="accent1"/>
+            </a:effectRef>
+            <a:fontRef idx="minor">
+              <a:schemeClr val="lt1"/>
+            </a:fontRef>
+          </p:style>
+          <p:txBody>
+            <a:bodyPr rtlCol="0" anchor="ctr"/>
+            <a:lstStyle/>
+            <a:p>
+              <a:pPr algn="ctr"/>
+              <a:endParaRPr lang="zh-CN" altLang="en-US"/>
+            </a:p>
+          </p:txBody>
+        </p:sp>
+      </p:grpSp>
+    </p:spTree>
+    <p:extLst>
+      <p:ext uri="{BB962C8B-B14F-4D97-AF65-F5344CB8AC3E}">
+        <p14:creationId xmlns:p14="http://schemas.microsoft.com/office/powerpoint/2010/main" val="2065436836"/>
+      </p:ext>
+    </p:extLst>
+  </p:cSld>
+  <p:clrMapOvr>
+    <a:masterClrMapping/>
+  </p:clrMapOvr>
+</p:sld>
+</file>
+
+<file path=ppt/slides/slide6.xml><?xml version="1.0" encoding="utf-8"?>
+<p:sld xmlns:a="http://schemas.openxmlformats.org/drawingml/2006/main" xmlns:r="http://schemas.openxmlformats.org/officeDocument/2006/relationships" xmlns:p="http://schemas.openxmlformats.org/presentationml/2006/main">
+  <p:cSld>
+    <p:spTree>
+      <p:nvGrpSpPr>
+        <p:cNvPr id="1" name=""/>
+        <p:cNvGrpSpPr/>
+        <p:nvPr/>
+      </p:nvGrpSpPr>
+      <p:grpSpPr>
+        <a:xfrm>
+          <a:off x="0" y="0"/>
+          <a:ext cx="0" cy="0"/>
+          <a:chOff x="0" y="0"/>
+          <a:chExt cx="0" cy="0"/>
+        </a:xfrm>
+      </p:grpSpPr>
       <p:sp>
         <p:nvSpPr>
-          <p:cNvPr id="14" name="矩形 13">
-            <a:extLst>
-              <a:ext uri="{FF2B5EF4-FFF2-40B4-BE49-F238E27FC236}">
-                <a16:creationId xmlns:a16="http://schemas.microsoft.com/office/drawing/2014/main" id="{8847F11D-1FD2-4296-B019-4473B2CE8FE3}"/>
+          <p:cNvPr id="4" name="矩形: 圆角 3">
+            <a:extLst>
+              <a:ext uri="{FF2B5EF4-FFF2-40B4-BE49-F238E27FC236}">
+                <a16:creationId xmlns:a16="http://schemas.microsoft.com/office/drawing/2014/main" id="{F75FD465-263F-41EC-A479-98B0E444CFD0}"/>
               </a:ext>
             </a:extLst>
           </p:cNvPr>
@@ -8674,61 +10112,7 @@
         </p:nvSpPr>
         <p:spPr>
           <a:xfrm>
-            <a:off x="-10420155" y="8378736"/>
-            <a:ext cx="9187543" cy="9927280"/>
-          </a:xfrm>
-          <a:prstGeom prst="rect">
-            <a:avLst/>
-          </a:prstGeom>
-          <a:solidFill>
-            <a:schemeClr val="bg1"/>
-          </a:solidFill>
-          <a:ln>
-            <a:solidFill>
-              <a:srgbClr val="41B3A5"/>
-            </a:solidFill>
-          </a:ln>
-        </p:spPr>
-        <p:style>
-          <a:lnRef idx="2">
-            <a:schemeClr val="accent1">
-              <a:shade val="50000"/>
-            </a:schemeClr>
-          </a:lnRef>
-          <a:fillRef idx="1">
-            <a:schemeClr val="accent1"/>
-          </a:fillRef>
-          <a:effectRef idx="0">
-            <a:schemeClr val="accent1"/>
-          </a:effectRef>
-          <a:fontRef idx="minor">
-            <a:schemeClr val="lt1"/>
-          </a:fontRef>
-        </p:style>
-        <p:txBody>
-          <a:bodyPr rtlCol="0" anchor="ctr"/>
-          <a:lstStyle/>
-          <a:p>
-            <a:pPr algn="ctr"/>
-            <a:endParaRPr lang="zh-CN" altLang="en-US"/>
-          </a:p>
-        </p:txBody>
-      </p:sp>
-      <p:sp>
-        <p:nvSpPr>
-          <p:cNvPr id="4" name="矩形: 圆角 3">
-            <a:extLst>
-              <a:ext uri="{FF2B5EF4-FFF2-40B4-BE49-F238E27FC236}">
-                <a16:creationId xmlns:a16="http://schemas.microsoft.com/office/drawing/2014/main" id="{F35D2215-EE07-476D-8536-467209C3764F}"/>
-              </a:ext>
-            </a:extLst>
-          </p:cNvPr>
-          <p:cNvSpPr/>
-          <p:nvPr/>
-        </p:nvSpPr>
-        <p:spPr>
-          <a:xfrm>
-            <a:off x="4839731" y="8700145"/>
+            <a:off x="2992227" y="724238"/>
             <a:ext cx="5409523" cy="5409523"/>
           </a:xfrm>
           <a:prstGeom prst="roundRect">
@@ -8737,11 +10121,11 @@
             </a:avLst>
           </a:prstGeom>
           <a:solidFill>
-            <a:srgbClr val="65ACF3"/>
+            <a:srgbClr val="79DB9F"/>
           </a:solidFill>
           <a:ln w="508000">
             <a:solidFill>
-              <a:srgbClr val="FAD960"/>
+              <a:srgbClr val="684EB3"/>
             </a:solidFill>
           </a:ln>
           <a:effectLst>
@@ -8788,371 +10172,392 @@
           </a:p>
         </p:txBody>
       </p:sp>
-      <p:sp>
-        <p:nvSpPr>
-          <p:cNvPr id="6" name="任意多边形: 形状 5">
-            <a:extLst>
-              <a:ext uri="{FF2B5EF4-FFF2-40B4-BE49-F238E27FC236}">
-                <a16:creationId xmlns:a16="http://schemas.microsoft.com/office/drawing/2014/main" id="{F67471EB-A9A5-44B1-BD87-F65AC7A9DE4B}"/>
-              </a:ext>
-            </a:extLst>
-          </p:cNvPr>
-          <p:cNvSpPr/>
+      <p:grpSp>
+        <p:nvGrpSpPr>
+          <p:cNvPr id="5" name="组合 4">
+            <a:extLst>
+              <a:ext uri="{FF2B5EF4-FFF2-40B4-BE49-F238E27FC236}">
+                <a16:creationId xmlns:a16="http://schemas.microsoft.com/office/drawing/2014/main" id="{449663D4-4B23-485B-A4B6-84F1E51EC0E0}"/>
+              </a:ext>
+            </a:extLst>
+          </p:cNvPr>
+          <p:cNvGrpSpPr/>
           <p:nvPr/>
-        </p:nvSpPr>
-        <p:spPr>
-          <a:xfrm rot="18900000">
-            <a:off x="4560408" y="9214547"/>
-            <a:ext cx="3950660" cy="2349317"/>
+        </p:nvGrpSpPr>
+        <p:grpSpPr>
+          <a:xfrm>
+            <a:off x="3097984" y="1469858"/>
+            <a:ext cx="5198008" cy="3918283"/>
+            <a:chOff x="16057796" y="9461491"/>
+            <a:chExt cx="5198008" cy="3918283"/>
           </a:xfrm>
-          <a:custGeom>
-            <a:avLst/>
-            <a:gdLst>
-              <a:gd name="connsiteX0" fmla="*/ 2498460 w 4395415"/>
-              <a:gd name="connsiteY0" fmla="*/ 125093 h 2613796"/>
-              <a:gd name="connsiteX1" fmla="*/ 4395415 w 4395415"/>
-              <a:gd name="connsiteY1" fmla="*/ 2022047 h 2613796"/>
-              <a:gd name="connsiteX2" fmla="*/ 4390078 w 4395415"/>
-              <a:gd name="connsiteY2" fmla="*/ 2026871 h 2613796"/>
-              <a:gd name="connsiteX3" fmla="*/ 4072073 w 4395415"/>
-              <a:gd name="connsiteY3" fmla="*/ 2560523 h 2613796"/>
-              <a:gd name="connsiteX4" fmla="*/ 4059067 w 4395415"/>
-              <a:gd name="connsiteY4" fmla="*/ 2613796 h 2613796"/>
-              <a:gd name="connsiteX5" fmla="*/ 337975 w 4395415"/>
-              <a:gd name="connsiteY5" fmla="*/ 2613795 h 2613796"/>
-              <a:gd name="connsiteX6" fmla="*/ 324646 w 4395415"/>
-              <a:gd name="connsiteY6" fmla="*/ 2559204 h 2613796"/>
-              <a:gd name="connsiteX7" fmla="*/ 6641 w 4395415"/>
-              <a:gd name="connsiteY7" fmla="*/ 2025551 h 2613796"/>
-              <a:gd name="connsiteX8" fmla="*/ 0 w 4395415"/>
-              <a:gd name="connsiteY8" fmla="*/ 2019549 h 2613796"/>
-              <a:gd name="connsiteX9" fmla="*/ 1894457 w 4395415"/>
-              <a:gd name="connsiteY9" fmla="*/ 125093 h 2613796"/>
-              <a:gd name="connsiteX10" fmla="*/ 2498460 w 4395415"/>
-              <a:gd name="connsiteY10" fmla="*/ 125093 h 2613796"/>
-            </a:gdLst>
-            <a:ahLst/>
-            <a:cxnLst>
-              <a:cxn ang="0">
-                <a:pos x="connsiteX0" y="connsiteY0"/>
-              </a:cxn>
-              <a:cxn ang="0">
-                <a:pos x="connsiteX1" y="connsiteY1"/>
-              </a:cxn>
-              <a:cxn ang="0">
-                <a:pos x="connsiteX2" y="connsiteY2"/>
-              </a:cxn>
-              <a:cxn ang="0">
-                <a:pos x="connsiteX3" y="connsiteY3"/>
-              </a:cxn>
-              <a:cxn ang="0">
-                <a:pos x="connsiteX4" y="connsiteY4"/>
-              </a:cxn>
-              <a:cxn ang="0">
-                <a:pos x="connsiteX5" y="connsiteY5"/>
-              </a:cxn>
-              <a:cxn ang="0">
-                <a:pos x="connsiteX6" y="connsiteY6"/>
-              </a:cxn>
-              <a:cxn ang="0">
-                <a:pos x="connsiteX7" y="connsiteY7"/>
-              </a:cxn>
-              <a:cxn ang="0">
-                <a:pos x="connsiteX8" y="connsiteY8"/>
-              </a:cxn>
-              <a:cxn ang="0">
-                <a:pos x="connsiteX9" y="connsiteY9"/>
-              </a:cxn>
-              <a:cxn ang="0">
-                <a:pos x="connsiteX10" y="connsiteY10"/>
-              </a:cxn>
-            </a:cxnLst>
-            <a:rect l="l" t="t" r="r" b="b"/>
-            <a:pathLst>
-              <a:path w="4395415" h="2613796">
-                <a:moveTo>
-                  <a:pt x="2498460" y="125093"/>
-                </a:moveTo>
-                <a:lnTo>
-                  <a:pt x="4395415" y="2022047"/>
-                </a:lnTo>
-                <a:lnTo>
-                  <a:pt x="4390078" y="2026871"/>
-                </a:lnTo>
-                <a:cubicBezTo>
-                  <a:pt x="4235894" y="2181055"/>
-                  <a:pt x="4129892" y="2365176"/>
-                  <a:pt x="4072073" y="2560523"/>
-                </a:cubicBezTo>
-                <a:lnTo>
-                  <a:pt x="4059067" y="2613796"/>
-                </a:lnTo>
-                <a:lnTo>
-                  <a:pt x="337975" y="2613795"/>
-                </a:lnTo>
-                <a:lnTo>
-                  <a:pt x="324646" y="2559204"/>
-                </a:lnTo>
-                <a:cubicBezTo>
-                  <a:pt x="266827" y="2363857"/>
-                  <a:pt x="160826" y="2179735"/>
-                  <a:pt x="6641" y="2025551"/>
-                </a:cubicBezTo>
-                <a:lnTo>
-                  <a:pt x="0" y="2019549"/>
-                </a:lnTo>
-                <a:lnTo>
-                  <a:pt x="1894457" y="125093"/>
-                </a:lnTo>
-                <a:cubicBezTo>
-                  <a:pt x="2061248" y="-41698"/>
-                  <a:pt x="2331669" y="-41698"/>
-                  <a:pt x="2498460" y="125093"/>
-                </a:cubicBezTo>
-                <a:close/>
-              </a:path>
-            </a:pathLst>
-          </a:custGeom>
-          <a:solidFill>
-            <a:srgbClr val="42B4A5"/>
-          </a:solidFill>
-          <a:ln w="254000">
+        </p:grpSpPr>
+        <p:sp>
+          <p:nvSpPr>
+            <p:cNvPr id="6" name="任意多边形: 形状 5">
+              <a:extLst>
+                <a:ext uri="{FF2B5EF4-FFF2-40B4-BE49-F238E27FC236}">
+                  <a16:creationId xmlns:a16="http://schemas.microsoft.com/office/drawing/2014/main" id="{09424F2E-7896-4497-9FC2-3A6ACF33114C}"/>
+                </a:ext>
+              </a:extLst>
+            </p:cNvPr>
+            <p:cNvSpPr/>
+            <p:nvPr/>
+          </p:nvSpPr>
+          <p:spPr>
+            <a:xfrm rot="18900000">
+              <a:off x="16057796" y="9461491"/>
+              <a:ext cx="3176091" cy="1888708"/>
+            </a:xfrm>
+            <a:custGeom>
+              <a:avLst/>
+              <a:gdLst>
+                <a:gd name="connsiteX0" fmla="*/ 2498460 w 4395415"/>
+                <a:gd name="connsiteY0" fmla="*/ 125093 h 2613796"/>
+                <a:gd name="connsiteX1" fmla="*/ 4395415 w 4395415"/>
+                <a:gd name="connsiteY1" fmla="*/ 2022047 h 2613796"/>
+                <a:gd name="connsiteX2" fmla="*/ 4390078 w 4395415"/>
+                <a:gd name="connsiteY2" fmla="*/ 2026871 h 2613796"/>
+                <a:gd name="connsiteX3" fmla="*/ 4072073 w 4395415"/>
+                <a:gd name="connsiteY3" fmla="*/ 2560523 h 2613796"/>
+                <a:gd name="connsiteX4" fmla="*/ 4059067 w 4395415"/>
+                <a:gd name="connsiteY4" fmla="*/ 2613796 h 2613796"/>
+                <a:gd name="connsiteX5" fmla="*/ 337975 w 4395415"/>
+                <a:gd name="connsiteY5" fmla="*/ 2613795 h 2613796"/>
+                <a:gd name="connsiteX6" fmla="*/ 324646 w 4395415"/>
+                <a:gd name="connsiteY6" fmla="*/ 2559204 h 2613796"/>
+                <a:gd name="connsiteX7" fmla="*/ 6641 w 4395415"/>
+                <a:gd name="connsiteY7" fmla="*/ 2025551 h 2613796"/>
+                <a:gd name="connsiteX8" fmla="*/ 0 w 4395415"/>
+                <a:gd name="connsiteY8" fmla="*/ 2019549 h 2613796"/>
+                <a:gd name="connsiteX9" fmla="*/ 1894457 w 4395415"/>
+                <a:gd name="connsiteY9" fmla="*/ 125093 h 2613796"/>
+                <a:gd name="connsiteX10" fmla="*/ 2498460 w 4395415"/>
+                <a:gd name="connsiteY10" fmla="*/ 125093 h 2613796"/>
+              </a:gdLst>
+              <a:ahLst/>
+              <a:cxnLst>
+                <a:cxn ang="0">
+                  <a:pos x="connsiteX0" y="connsiteY0"/>
+                </a:cxn>
+                <a:cxn ang="0">
+                  <a:pos x="connsiteX1" y="connsiteY1"/>
+                </a:cxn>
+                <a:cxn ang="0">
+                  <a:pos x="connsiteX2" y="connsiteY2"/>
+                </a:cxn>
+                <a:cxn ang="0">
+                  <a:pos x="connsiteX3" y="connsiteY3"/>
+                </a:cxn>
+                <a:cxn ang="0">
+                  <a:pos x="connsiteX4" y="connsiteY4"/>
+                </a:cxn>
+                <a:cxn ang="0">
+                  <a:pos x="connsiteX5" y="connsiteY5"/>
+                </a:cxn>
+                <a:cxn ang="0">
+                  <a:pos x="connsiteX6" y="connsiteY6"/>
+                </a:cxn>
+                <a:cxn ang="0">
+                  <a:pos x="connsiteX7" y="connsiteY7"/>
+                </a:cxn>
+                <a:cxn ang="0">
+                  <a:pos x="connsiteX8" y="connsiteY8"/>
+                </a:cxn>
+                <a:cxn ang="0">
+                  <a:pos x="connsiteX9" y="connsiteY9"/>
+                </a:cxn>
+                <a:cxn ang="0">
+                  <a:pos x="connsiteX10" y="connsiteY10"/>
+                </a:cxn>
+              </a:cxnLst>
+              <a:rect l="l" t="t" r="r" b="b"/>
+              <a:pathLst>
+                <a:path w="4395415" h="2613796">
+                  <a:moveTo>
+                    <a:pt x="2498460" y="125093"/>
+                  </a:moveTo>
+                  <a:lnTo>
+                    <a:pt x="4395415" y="2022047"/>
+                  </a:lnTo>
+                  <a:lnTo>
+                    <a:pt x="4390078" y="2026871"/>
+                  </a:lnTo>
+                  <a:cubicBezTo>
+                    <a:pt x="4235894" y="2181055"/>
+                    <a:pt x="4129892" y="2365176"/>
+                    <a:pt x="4072073" y="2560523"/>
+                  </a:cubicBezTo>
+                  <a:lnTo>
+                    <a:pt x="4059067" y="2613796"/>
+                  </a:lnTo>
+                  <a:lnTo>
+                    <a:pt x="337975" y="2613795"/>
+                  </a:lnTo>
+                  <a:lnTo>
+                    <a:pt x="324646" y="2559204"/>
+                  </a:lnTo>
+                  <a:cubicBezTo>
+                    <a:pt x="266827" y="2363857"/>
+                    <a:pt x="160826" y="2179735"/>
+                    <a:pt x="6641" y="2025551"/>
+                  </a:cubicBezTo>
+                  <a:lnTo>
+                    <a:pt x="0" y="2019549"/>
+                  </a:lnTo>
+                  <a:lnTo>
+                    <a:pt x="1894457" y="125093"/>
+                  </a:lnTo>
+                  <a:cubicBezTo>
+                    <a:pt x="2061248" y="-41698"/>
+                    <a:pt x="2331669" y="-41698"/>
+                    <a:pt x="2498460" y="125093"/>
+                  </a:cubicBezTo>
+                  <a:close/>
+                </a:path>
+              </a:pathLst>
+            </a:custGeom>
             <a:solidFill>
-              <a:srgbClr val="F9FAFE"/>
+              <a:srgbClr val="F9D55B"/>
             </a:solidFill>
-          </a:ln>
-          <a:effectLst>
-            <a:outerShdw blurRad="381000" dist="254000" dir="8100000" algn="tr" rotWithShape="0">
-              <a:srgbClr val="182432">
-                <a:alpha val="50000"/>
-              </a:srgbClr>
-            </a:outerShdw>
-          </a:effectLst>
-          <a:scene3d>
-            <a:camera prst="orthographicFront">
-              <a:rot lat="0" lon="0" rev="0"/>
-            </a:camera>
-            <a:lightRig rig="brightRoom" dir="t">
-              <a:rot lat="0" lon="0" rev="600000"/>
-            </a:lightRig>
-          </a:scene3d>
-          <a:sp3d prstMaterial="metal">
-            <a:bevelT w="190500" h="57150" prst="angle"/>
-          </a:sp3d>
-        </p:spPr>
-        <p:style>
-          <a:lnRef idx="2">
-            <a:schemeClr val="accent1">
-              <a:shade val="50000"/>
-            </a:schemeClr>
-          </a:lnRef>
-          <a:fillRef idx="1">
-            <a:schemeClr val="accent1"/>
-          </a:fillRef>
-          <a:effectRef idx="0">
-            <a:schemeClr val="accent1"/>
-          </a:effectRef>
-          <a:fontRef idx="minor">
-            <a:schemeClr val="lt1"/>
-          </a:fontRef>
-        </p:style>
-        <p:txBody>
-          <a:bodyPr wrap="square" rtlCol="0" anchor="ctr">
-            <a:noAutofit/>
-          </a:bodyPr>
-          <a:lstStyle/>
-          <a:p>
-            <a:pPr algn="ctr"/>
-            <a:endParaRPr lang="zh-CN" altLang="en-US"/>
-          </a:p>
-        </p:txBody>
-      </p:sp>
-      <p:sp>
-        <p:nvSpPr>
-          <p:cNvPr id="7" name="任意多边形: 形状 6">
-            <a:extLst>
-              <a:ext uri="{FF2B5EF4-FFF2-40B4-BE49-F238E27FC236}">
-                <a16:creationId xmlns:a16="http://schemas.microsoft.com/office/drawing/2014/main" id="{D2E13586-D1A2-4F89-910C-20DB4850D167}"/>
-              </a:ext>
-            </a:extLst>
-          </p:cNvPr>
-          <p:cNvSpPr/>
-          <p:nvPr/>
-        </p:nvSpPr>
-        <p:spPr>
-          <a:xfrm rot="18900000">
-            <a:off x="6604266" y="11245948"/>
-            <a:ext cx="3924310" cy="2349317"/>
-          </a:xfrm>
-          <a:custGeom>
-            <a:avLst/>
-            <a:gdLst>
-              <a:gd name="connsiteX0" fmla="*/ 4037407 w 4366098"/>
-              <a:gd name="connsiteY0" fmla="*/ 1 h 2613796"/>
-              <a:gd name="connsiteX1" fmla="*/ 4057978 w 4366098"/>
-              <a:gd name="connsiteY1" fmla="*/ 84255 h 2613796"/>
-              <a:gd name="connsiteX2" fmla="*/ 4289254 w 4366098"/>
-              <a:gd name="connsiteY2" fmla="*/ 521954 h 2613796"/>
-              <a:gd name="connsiteX3" fmla="*/ 4366098 w 4366098"/>
-              <a:gd name="connsiteY3" fmla="*/ 606971 h 2613796"/>
-              <a:gd name="connsiteX4" fmla="*/ 2484365 w 4366098"/>
-              <a:gd name="connsiteY4" fmla="*/ 2488703 h 2613796"/>
-              <a:gd name="connsiteX5" fmla="*/ 1880362 w 4366098"/>
-              <a:gd name="connsiteY5" fmla="*/ 2488703 h 2613796"/>
-              <a:gd name="connsiteX6" fmla="*/ 0 w 4366098"/>
-              <a:gd name="connsiteY6" fmla="*/ 608342 h 2613796"/>
-              <a:gd name="connsiteX7" fmla="*/ 79275 w 4366098"/>
-              <a:gd name="connsiteY7" fmla="*/ 520635 h 2613796"/>
-              <a:gd name="connsiteX8" fmla="*/ 310551 w 4366098"/>
-              <a:gd name="connsiteY8" fmla="*/ 82935 h 2613796"/>
-              <a:gd name="connsiteX9" fmla="*/ 330801 w 4366098"/>
-              <a:gd name="connsiteY9" fmla="*/ 0 h 2613796"/>
-              <a:gd name="connsiteX10" fmla="*/ 4037407 w 4366098"/>
-              <a:gd name="connsiteY10" fmla="*/ 1 h 2613796"/>
-            </a:gdLst>
-            <a:ahLst/>
-            <a:cxnLst>
-              <a:cxn ang="0">
-                <a:pos x="connsiteX0" y="connsiteY0"/>
-              </a:cxn>
-              <a:cxn ang="0">
-                <a:pos x="connsiteX1" y="connsiteY1"/>
-              </a:cxn>
-              <a:cxn ang="0">
-                <a:pos x="connsiteX2" y="connsiteY2"/>
-              </a:cxn>
-              <a:cxn ang="0">
-                <a:pos x="connsiteX3" y="connsiteY3"/>
-              </a:cxn>
-              <a:cxn ang="0">
-                <a:pos x="connsiteX4" y="connsiteY4"/>
-              </a:cxn>
-              <a:cxn ang="0">
-                <a:pos x="connsiteX5" y="connsiteY5"/>
-              </a:cxn>
-              <a:cxn ang="0">
-                <a:pos x="connsiteX6" y="connsiteY6"/>
-              </a:cxn>
-              <a:cxn ang="0">
-                <a:pos x="connsiteX7" y="connsiteY7"/>
-              </a:cxn>
-              <a:cxn ang="0">
-                <a:pos x="connsiteX8" y="connsiteY8"/>
-              </a:cxn>
-              <a:cxn ang="0">
-                <a:pos x="connsiteX9" y="connsiteY9"/>
-              </a:cxn>
-              <a:cxn ang="0">
-                <a:pos x="connsiteX10" y="connsiteY10"/>
-              </a:cxn>
-            </a:cxnLst>
-            <a:rect l="l" t="t" r="r" b="b"/>
-            <a:pathLst>
-              <a:path w="4366098" h="2613796">
-                <a:moveTo>
-                  <a:pt x="4037407" y="1"/>
-                </a:moveTo>
-                <a:lnTo>
-                  <a:pt x="4057978" y="84255"/>
-                </a:lnTo>
-                <a:cubicBezTo>
-                  <a:pt x="4104233" y="240532"/>
-                  <a:pt x="4181325" y="389626"/>
-                  <a:pt x="4289254" y="521954"/>
-                </a:cubicBezTo>
-                <a:lnTo>
-                  <a:pt x="4366098" y="606971"/>
-                </a:lnTo>
-                <a:lnTo>
-                  <a:pt x="2484365" y="2488703"/>
-                </a:lnTo>
-                <a:cubicBezTo>
-                  <a:pt x="2317574" y="2655494"/>
-                  <a:pt x="2047153" y="2655494"/>
-                  <a:pt x="1880362" y="2488703"/>
-                </a:cubicBezTo>
-                <a:lnTo>
-                  <a:pt x="0" y="608342"/>
-                </a:lnTo>
-                <a:lnTo>
-                  <a:pt x="79275" y="520635"/>
-                </a:lnTo>
-                <a:cubicBezTo>
-                  <a:pt x="187204" y="388306"/>
-                  <a:pt x="264296" y="239213"/>
-                  <a:pt x="310551" y="82935"/>
-                </a:cubicBezTo>
-                <a:lnTo>
-                  <a:pt x="330801" y="0"/>
-                </a:lnTo>
-                <a:lnTo>
-                  <a:pt x="4037407" y="1"/>
-                </a:lnTo>
-                <a:close/>
-              </a:path>
-            </a:pathLst>
-          </a:custGeom>
-          <a:solidFill>
-            <a:srgbClr val="EAD49A"/>
-          </a:solidFill>
-          <a:ln w="254000">
+            <a:ln w="254000">
+              <a:solidFill>
+                <a:srgbClr val="F9FAFE"/>
+              </a:solidFill>
+            </a:ln>
+            <a:effectLst>
+              <a:outerShdw blurRad="381000" dist="254000" dir="8100000" algn="tr" rotWithShape="0">
+                <a:srgbClr val="182432">
+                  <a:alpha val="50000"/>
+                </a:srgbClr>
+              </a:outerShdw>
+            </a:effectLst>
+            <a:scene3d>
+              <a:camera prst="orthographicFront">
+                <a:rot lat="0" lon="0" rev="0"/>
+              </a:camera>
+              <a:lightRig rig="brightRoom" dir="t">
+                <a:rot lat="0" lon="0" rev="600000"/>
+              </a:lightRig>
+            </a:scene3d>
+            <a:sp3d prstMaterial="metal">
+              <a:bevelT w="190500" h="57150" prst="angle"/>
+            </a:sp3d>
+          </p:spPr>
+          <p:style>
+            <a:lnRef idx="2">
+              <a:schemeClr val="accent1">
+                <a:shade val="50000"/>
+              </a:schemeClr>
+            </a:lnRef>
+            <a:fillRef idx="1">
+              <a:schemeClr val="accent1"/>
+            </a:fillRef>
+            <a:effectRef idx="0">
+              <a:schemeClr val="accent1"/>
+            </a:effectRef>
+            <a:fontRef idx="minor">
+              <a:schemeClr val="lt1"/>
+            </a:fontRef>
+          </p:style>
+          <p:txBody>
+            <a:bodyPr wrap="square" rtlCol="0" anchor="ctr">
+              <a:noAutofit/>
+            </a:bodyPr>
+            <a:lstStyle/>
+            <a:p>
+              <a:pPr algn="ctr"/>
+              <a:endParaRPr lang="zh-CN" altLang="en-US"/>
+            </a:p>
+          </p:txBody>
+        </p:sp>
+        <p:sp>
+          <p:nvSpPr>
+            <p:cNvPr id="7" name="任意多边形: 形状 6">
+              <a:extLst>
+                <a:ext uri="{FF2B5EF4-FFF2-40B4-BE49-F238E27FC236}">
+                  <a16:creationId xmlns:a16="http://schemas.microsoft.com/office/drawing/2014/main" id="{9677E881-A718-49B7-B48F-37B3CBD13943}"/>
+                </a:ext>
+              </a:extLst>
+            </p:cNvPr>
+            <p:cNvSpPr/>
+            <p:nvPr/>
+          </p:nvSpPr>
+          <p:spPr>
+            <a:xfrm rot="18900000">
+              <a:off x="18100897" y="11491066"/>
+              <a:ext cx="3154907" cy="1888708"/>
+            </a:xfrm>
+            <a:custGeom>
+              <a:avLst/>
+              <a:gdLst>
+                <a:gd name="connsiteX0" fmla="*/ 4037407 w 4366098"/>
+                <a:gd name="connsiteY0" fmla="*/ 1 h 2613796"/>
+                <a:gd name="connsiteX1" fmla="*/ 4057978 w 4366098"/>
+                <a:gd name="connsiteY1" fmla="*/ 84255 h 2613796"/>
+                <a:gd name="connsiteX2" fmla="*/ 4289254 w 4366098"/>
+                <a:gd name="connsiteY2" fmla="*/ 521954 h 2613796"/>
+                <a:gd name="connsiteX3" fmla="*/ 4366098 w 4366098"/>
+                <a:gd name="connsiteY3" fmla="*/ 606971 h 2613796"/>
+                <a:gd name="connsiteX4" fmla="*/ 2484365 w 4366098"/>
+                <a:gd name="connsiteY4" fmla="*/ 2488703 h 2613796"/>
+                <a:gd name="connsiteX5" fmla="*/ 1880362 w 4366098"/>
+                <a:gd name="connsiteY5" fmla="*/ 2488703 h 2613796"/>
+                <a:gd name="connsiteX6" fmla="*/ 0 w 4366098"/>
+                <a:gd name="connsiteY6" fmla="*/ 608342 h 2613796"/>
+                <a:gd name="connsiteX7" fmla="*/ 79275 w 4366098"/>
+                <a:gd name="connsiteY7" fmla="*/ 520635 h 2613796"/>
+                <a:gd name="connsiteX8" fmla="*/ 310551 w 4366098"/>
+                <a:gd name="connsiteY8" fmla="*/ 82935 h 2613796"/>
+                <a:gd name="connsiteX9" fmla="*/ 330801 w 4366098"/>
+                <a:gd name="connsiteY9" fmla="*/ 0 h 2613796"/>
+                <a:gd name="connsiteX10" fmla="*/ 4037407 w 4366098"/>
+                <a:gd name="connsiteY10" fmla="*/ 1 h 2613796"/>
+              </a:gdLst>
+              <a:ahLst/>
+              <a:cxnLst>
+                <a:cxn ang="0">
+                  <a:pos x="connsiteX0" y="connsiteY0"/>
+                </a:cxn>
+                <a:cxn ang="0">
+                  <a:pos x="connsiteX1" y="connsiteY1"/>
+                </a:cxn>
+                <a:cxn ang="0">
+                  <a:pos x="connsiteX2" y="connsiteY2"/>
+                </a:cxn>
+                <a:cxn ang="0">
+                  <a:pos x="connsiteX3" y="connsiteY3"/>
+                </a:cxn>
+                <a:cxn ang="0">
+                  <a:pos x="connsiteX4" y="connsiteY4"/>
+                </a:cxn>
+                <a:cxn ang="0">
+                  <a:pos x="connsiteX5" y="connsiteY5"/>
+                </a:cxn>
+                <a:cxn ang="0">
+                  <a:pos x="connsiteX6" y="connsiteY6"/>
+                </a:cxn>
+                <a:cxn ang="0">
+                  <a:pos x="connsiteX7" y="connsiteY7"/>
+                </a:cxn>
+                <a:cxn ang="0">
+                  <a:pos x="connsiteX8" y="connsiteY8"/>
+                </a:cxn>
+                <a:cxn ang="0">
+                  <a:pos x="connsiteX9" y="connsiteY9"/>
+                </a:cxn>
+                <a:cxn ang="0">
+                  <a:pos x="connsiteX10" y="connsiteY10"/>
+                </a:cxn>
+              </a:cxnLst>
+              <a:rect l="l" t="t" r="r" b="b"/>
+              <a:pathLst>
+                <a:path w="4366098" h="2613796">
+                  <a:moveTo>
+                    <a:pt x="4037407" y="1"/>
+                  </a:moveTo>
+                  <a:lnTo>
+                    <a:pt x="4057978" y="84255"/>
+                  </a:lnTo>
+                  <a:cubicBezTo>
+                    <a:pt x="4104233" y="240532"/>
+                    <a:pt x="4181325" y="389626"/>
+                    <a:pt x="4289254" y="521954"/>
+                  </a:cubicBezTo>
+                  <a:lnTo>
+                    <a:pt x="4366098" y="606971"/>
+                  </a:lnTo>
+                  <a:lnTo>
+                    <a:pt x="2484365" y="2488703"/>
+                  </a:lnTo>
+                  <a:cubicBezTo>
+                    <a:pt x="2317574" y="2655494"/>
+                    <a:pt x="2047153" y="2655494"/>
+                    <a:pt x="1880362" y="2488703"/>
+                  </a:cubicBezTo>
+                  <a:lnTo>
+                    <a:pt x="0" y="608342"/>
+                  </a:lnTo>
+                  <a:lnTo>
+                    <a:pt x="79275" y="520635"/>
+                  </a:lnTo>
+                  <a:cubicBezTo>
+                    <a:pt x="187204" y="388306"/>
+                    <a:pt x="264296" y="239213"/>
+                    <a:pt x="310551" y="82935"/>
+                  </a:cubicBezTo>
+                  <a:lnTo>
+                    <a:pt x="330801" y="0"/>
+                  </a:lnTo>
+                  <a:lnTo>
+                    <a:pt x="4037407" y="1"/>
+                  </a:lnTo>
+                  <a:close/>
+                </a:path>
+              </a:pathLst>
+            </a:custGeom>
             <a:solidFill>
-              <a:srgbClr val="F9FAFE"/>
+              <a:srgbClr val="92C4C1"/>
             </a:solidFill>
-            <a:prstDash val="solid"/>
-          </a:ln>
-          <a:effectLst>
-            <a:outerShdw blurRad="381000" dist="254000" dir="8100000" algn="tl" rotWithShape="0">
-              <a:srgbClr val="182432">
-                <a:alpha val="50000"/>
-              </a:srgbClr>
-            </a:outerShdw>
-          </a:effectLst>
-          <a:scene3d>
-            <a:camera prst="orthographicFront">
-              <a:rot lat="0" lon="0" rev="0"/>
-            </a:camera>
-            <a:lightRig rig="brightRoom" dir="t">
-              <a:rot lat="0" lon="0" rev="600000"/>
-            </a:lightRig>
-          </a:scene3d>
-          <a:sp3d prstMaterial="metal">
-            <a:bevelT w="190500" h="57150" prst="angle"/>
-          </a:sp3d>
-        </p:spPr>
-        <p:style>
-          <a:lnRef idx="2">
-            <a:schemeClr val="accent1">
-              <a:shade val="50000"/>
-            </a:schemeClr>
-          </a:lnRef>
-          <a:fillRef idx="1">
-            <a:schemeClr val="accent1"/>
-          </a:fillRef>
-          <a:effectRef idx="0">
-            <a:schemeClr val="accent1"/>
-          </a:effectRef>
-          <a:fontRef idx="minor">
-            <a:schemeClr val="lt1"/>
-          </a:fontRef>
-        </p:style>
-        <p:txBody>
-          <a:bodyPr wrap="square" rtlCol="0" anchor="ctr">
-            <a:noAutofit/>
-          </a:bodyPr>
-          <a:lstStyle/>
-          <a:p>
-            <a:pPr algn="ctr"/>
-            <a:endParaRPr lang="zh-CN" altLang="en-US" dirty="0"/>
-          </a:p>
-        </p:txBody>
-      </p:sp>
+            <a:ln w="254000">
+              <a:solidFill>
+                <a:srgbClr val="F9FAFE"/>
+              </a:solidFill>
+              <a:prstDash val="solid"/>
+            </a:ln>
+            <a:effectLst>
+              <a:outerShdw blurRad="381000" dist="254000" dir="8100000" algn="tl" rotWithShape="0">
+                <a:srgbClr val="182432">
+                  <a:alpha val="50000"/>
+                </a:srgbClr>
+              </a:outerShdw>
+            </a:effectLst>
+            <a:scene3d>
+              <a:camera prst="orthographicFront">
+                <a:rot lat="0" lon="0" rev="0"/>
+              </a:camera>
+              <a:lightRig rig="brightRoom" dir="t">
+                <a:rot lat="0" lon="0" rev="600000"/>
+              </a:lightRig>
+            </a:scene3d>
+            <a:sp3d prstMaterial="metal">
+              <a:bevelT w="190500" h="57150" prst="angle"/>
+            </a:sp3d>
+          </p:spPr>
+          <p:style>
+            <a:lnRef idx="2">
+              <a:schemeClr val="accent1">
+                <a:shade val="50000"/>
+              </a:schemeClr>
+            </a:lnRef>
+            <a:fillRef idx="1">
+              <a:schemeClr val="accent1"/>
+            </a:fillRef>
+            <a:effectRef idx="0">
+              <a:schemeClr val="accent1"/>
+            </a:effectRef>
+            <a:fontRef idx="minor">
+              <a:schemeClr val="lt1"/>
+            </a:fontRef>
+          </p:style>
+          <p:txBody>
+            <a:bodyPr wrap="square" rtlCol="0" anchor="ctr">
+              <a:noAutofit/>
+            </a:bodyPr>
+            <a:lstStyle/>
+            <a:p>
+              <a:pPr algn="ctr"/>
+              <a:endParaRPr lang="zh-CN" altLang="en-US" dirty="0"/>
+            </a:p>
+          </p:txBody>
+        </p:sp>
+      </p:grpSp>
       <p:sp>
         <p:nvSpPr>
           <p:cNvPr id="8" name="椭圆 7">
             <a:extLst>
               <a:ext uri="{FF2B5EF4-FFF2-40B4-BE49-F238E27FC236}">
-                <a16:creationId xmlns:a16="http://schemas.microsoft.com/office/drawing/2014/main" id="{D062AFA2-B932-4C85-B6B3-5FA54E099004}"/>
+                <a16:creationId xmlns:a16="http://schemas.microsoft.com/office/drawing/2014/main" id="{00C88AB8-F3BC-49E9-B8AE-5689BD7423D6}"/>
               </a:ext>
             </a:extLst>
           </p:cNvPr>
@@ -9163,7 +10568,7 @@
         </p:nvSpPr>
         <p:spPr>
           <a:xfrm>
-            <a:off x="8852435" y="9184150"/>
+            <a:off x="6859039" y="1345377"/>
             <a:ext cx="900000" cy="900000"/>
           </a:xfrm>
           <a:prstGeom prst="ellipse">
@@ -9226,7 +10631,7 @@
           <p:cNvPr id="9" name="椭圆 8">
             <a:extLst>
               <a:ext uri="{FF2B5EF4-FFF2-40B4-BE49-F238E27FC236}">
-                <a16:creationId xmlns:a16="http://schemas.microsoft.com/office/drawing/2014/main" id="{4AAFCD36-D66C-42F1-B156-0F00C6ED6D0B}"/>
+                <a16:creationId xmlns:a16="http://schemas.microsoft.com/office/drawing/2014/main" id="{9E7516BF-A824-4B26-85F2-D404FE0DBE75}"/>
               </a:ext>
             </a:extLst>
           </p:cNvPr>
@@ -9237,14 +10642,14 @@
         </p:nvSpPr>
         <p:spPr>
           <a:xfrm>
-            <a:off x="5323539" y="12734417"/>
+            <a:off x="3634937" y="4612621"/>
             <a:ext cx="900000" cy="900000"/>
           </a:xfrm>
           <a:prstGeom prst="ellipse">
             <a:avLst/>
           </a:prstGeom>
           <a:solidFill>
-            <a:schemeClr val="accent6"/>
+            <a:srgbClr val="1A3261"/>
           </a:solidFill>
           <a:ln w="38100">
             <a:solidFill>
@@ -9295,228 +10700,10 @@
           </a:p>
         </p:txBody>
       </p:sp>
-      <p:pic>
-        <p:nvPicPr>
-          <p:cNvPr id="11" name="图片 10">
-            <a:extLst>
-              <a:ext uri="{FF2B5EF4-FFF2-40B4-BE49-F238E27FC236}">
-                <a16:creationId xmlns:a16="http://schemas.microsoft.com/office/drawing/2014/main" id="{7DFC9001-56C5-449F-BB17-B7083E155D4A}"/>
-              </a:ext>
-            </a:extLst>
-          </p:cNvPr>
-          <p:cNvPicPr>
-            <a:picLocks noChangeAspect="1"/>
-          </p:cNvPicPr>
-          <p:nvPr/>
-        </p:nvPicPr>
-        <p:blipFill>
-          <a:blip r:embed="rId3">
-            <a:extLst>
-              <a:ext uri="{28A0092B-C50C-407E-A947-70E740481C1C}">
-                <a14:useLocalDpi xmlns:a14="http://schemas.microsoft.com/office/drawing/2010/main" val="0"/>
-              </a:ext>
-            </a:extLst>
-          </a:blip>
-          <a:stretch>
-            <a:fillRect/>
-          </a:stretch>
-        </p:blipFill>
-        <p:spPr>
-          <a:xfrm>
-            <a:off x="-4300482" y="10389205"/>
-            <a:ext cx="5906343" cy="5906343"/>
-          </a:xfrm>
-          <a:prstGeom prst="rect">
-            <a:avLst/>
-          </a:prstGeom>
-        </p:spPr>
-      </p:pic>
-      <p:pic>
-        <p:nvPicPr>
-          <p:cNvPr id="12" name="Picture 2" descr="王者荣耀小地图怎么看-小地图知识归纳整理-圈圈下载">
-            <a:extLst>
-              <a:ext uri="{FF2B5EF4-FFF2-40B4-BE49-F238E27FC236}">
-                <a16:creationId xmlns:a16="http://schemas.microsoft.com/office/drawing/2014/main" id="{30734A5A-E6BC-49FD-95B4-606C3B08A2A3}"/>
-              </a:ext>
-            </a:extLst>
-          </p:cNvPr>
-          <p:cNvPicPr>
-            <a:picLocks noChangeAspect="1" noChangeArrowheads="1"/>
-          </p:cNvPicPr>
-          <p:nvPr/>
-        </p:nvPicPr>
-        <p:blipFill>
-          <a:blip r:embed="rId4">
-            <a:extLst>
-              <a:ext uri="{28A0092B-C50C-407E-A947-70E740481C1C}">
-                <a14:useLocalDpi xmlns:a14="http://schemas.microsoft.com/office/drawing/2010/main" val="0"/>
-              </a:ext>
-            </a:extLst>
-          </a:blip>
-          <a:srcRect/>
-          <a:stretch>
-            <a:fillRect/>
-          </a:stretch>
-        </p:blipFill>
-        <p:spPr bwMode="auto">
-          <a:xfrm>
-            <a:off x="2019993" y="-2835303"/>
-            <a:ext cx="5524500" cy="4876800"/>
-          </a:xfrm>
-          <a:prstGeom prst="rect">
-            <a:avLst/>
-          </a:prstGeom>
-          <a:noFill/>
-          <a:extLst>
-            <a:ext uri="{909E8E84-426E-40DD-AFC4-6F175D3DCCD1}">
-              <a14:hiddenFill xmlns:a14="http://schemas.microsoft.com/office/drawing/2010/main">
-                <a:solidFill>
-                  <a:srgbClr val="FFFFFF"/>
-                </a:solidFill>
-              </a14:hiddenFill>
-            </a:ext>
-          </a:extLst>
-        </p:spPr>
-      </p:pic>
-      <p:pic>
-        <p:nvPicPr>
-          <p:cNvPr id="18" name="图片 17">
-            <a:extLst>
-              <a:ext uri="{FF2B5EF4-FFF2-40B4-BE49-F238E27FC236}">
-                <a16:creationId xmlns:a16="http://schemas.microsoft.com/office/drawing/2014/main" id="{EDCA0195-9AC4-4A79-8614-C7CA2FE227B1}"/>
-              </a:ext>
-            </a:extLst>
-          </p:cNvPr>
-          <p:cNvPicPr>
-            <a:picLocks noChangeAspect="1"/>
-          </p:cNvPicPr>
-          <p:nvPr/>
-        </p:nvPicPr>
-        <p:blipFill>
-          <a:blip r:embed="rId5"/>
-          <a:stretch>
-            <a:fillRect/>
-          </a:stretch>
-        </p:blipFill>
-        <p:spPr>
-          <a:xfrm>
-            <a:off x="-44612329" y="21193739"/>
-            <a:ext cx="18969644" cy="8117792"/>
-          </a:xfrm>
-          <a:prstGeom prst="rect">
-            <a:avLst/>
-          </a:prstGeom>
-        </p:spPr>
-      </p:pic>
-      <p:sp>
-        <p:nvSpPr>
-          <p:cNvPr id="2" name="AutoShape 2">
-            <a:extLst>
-              <a:ext uri="{FF2B5EF4-FFF2-40B4-BE49-F238E27FC236}">
-                <a16:creationId xmlns:a16="http://schemas.microsoft.com/office/drawing/2014/main" id="{F79963A8-3203-4494-9341-08E4083BA84A}"/>
-              </a:ext>
-            </a:extLst>
-          </p:cNvPr>
-          <p:cNvSpPr>
-            <a:spLocks noChangeAspect="1" noChangeArrowheads="1"/>
-          </p:cNvSpPr>
-          <p:nvPr/>
-        </p:nvSpPr>
-        <p:spPr bwMode="auto">
-          <a:xfrm>
-            <a:off x="1123115" y="6684320"/>
-            <a:ext cx="304800" cy="304800"/>
-          </a:xfrm>
-          <a:prstGeom prst="rect">
-            <a:avLst/>
-          </a:prstGeom>
-          <a:noFill/>
-          <a:extLst>
-            <a:ext uri="{909E8E84-426E-40DD-AFC4-6F175D3DCCD1}">
-              <a14:hiddenFill xmlns:a14="http://schemas.microsoft.com/office/drawing/2010/main">
-                <a:solidFill>
-                  <a:srgbClr val="FFFFFF"/>
-                </a:solidFill>
-              </a14:hiddenFill>
-            </a:ext>
-          </a:extLst>
-        </p:spPr>
-        <p:txBody>
-          <a:bodyPr vert="horz" wrap="square" lIns="91440" tIns="45720" rIns="91440" bIns="45720" numCol="1" anchor="t" anchorCtr="0" compatLnSpc="1">
-            <a:prstTxWarp prst="textNoShape">
-              <a:avLst/>
-            </a:prstTxWarp>
-          </a:bodyPr>
-          <a:lstStyle/>
-          <a:p>
-            <a:endParaRPr lang="zh-CN" altLang="en-US"/>
-          </a:p>
-        </p:txBody>
-      </p:sp>
-      <p:pic>
-        <p:nvPicPr>
-          <p:cNvPr id="3" name="图片 2">
-            <a:extLst>
-              <a:ext uri="{FF2B5EF4-FFF2-40B4-BE49-F238E27FC236}">
-                <a16:creationId xmlns:a16="http://schemas.microsoft.com/office/drawing/2014/main" id="{EAB2175C-C157-4666-9ADE-6BC5DB70256C}"/>
-              </a:ext>
-            </a:extLst>
-          </p:cNvPr>
-          <p:cNvPicPr>
-            <a:picLocks noChangeAspect="1"/>
-          </p:cNvPicPr>
-          <p:nvPr/>
-        </p:nvPicPr>
-        <p:blipFill>
-          <a:blip r:embed="rId6"/>
-          <a:stretch>
-            <a:fillRect/>
-          </a:stretch>
-        </p:blipFill>
-        <p:spPr>
-          <a:xfrm>
-            <a:off x="16805997" y="-1772837"/>
-            <a:ext cx="10776271" cy="8369388"/>
-          </a:xfrm>
-          <a:prstGeom prst="rect">
-            <a:avLst/>
-          </a:prstGeom>
-        </p:spPr>
-      </p:pic>
-      <p:pic>
-        <p:nvPicPr>
-          <p:cNvPr id="5" name="图片 4">
-            <a:extLst>
-              <a:ext uri="{FF2B5EF4-FFF2-40B4-BE49-F238E27FC236}">
-                <a16:creationId xmlns:a16="http://schemas.microsoft.com/office/drawing/2014/main" id="{7C47ED3A-8DBF-4B90-8231-D7529BAA01BB}"/>
-              </a:ext>
-            </a:extLst>
-          </p:cNvPr>
-          <p:cNvPicPr>
-            <a:picLocks noChangeAspect="1"/>
-          </p:cNvPicPr>
-          <p:nvPr/>
-        </p:nvPicPr>
-        <p:blipFill>
-          <a:blip r:embed="rId7"/>
-          <a:stretch>
-            <a:fillRect/>
-          </a:stretch>
-        </p:blipFill>
-        <p:spPr>
-          <a:xfrm>
-            <a:off x="6281737" y="-1756934"/>
-            <a:ext cx="9939435" cy="7760066"/>
-          </a:xfrm>
-          <a:prstGeom prst="rect">
-            <a:avLst/>
-          </a:prstGeom>
-        </p:spPr>
-      </p:pic>
     </p:spTree>
     <p:extLst>
       <p:ext uri="{BB962C8B-B14F-4D97-AF65-F5344CB8AC3E}">
-        <p14:creationId xmlns:p14="http://schemas.microsoft.com/office/powerpoint/2010/main" val="2438560776"/>
+        <p14:creationId xmlns:p14="http://schemas.microsoft.com/office/powerpoint/2010/main" val="630772885"/>
       </p:ext>
     </p:extLst>
   </p:cSld>
